--- a/LocalTests/reports/Apresentacao_Robustez_Sintonia_PI.pptx
+++ b/LocalTests/reports/Apresentacao_Robustez_Sintonia_PI.pptx
@@ -5,18 +5,18 @@
     <p:sldMasterId id="2147483648" r:id="rId1"/>
   </p:sldMasterIdLst>
   <p:sldIdLst>
-    <p:sldId id="256" r:id="rId7"/>
-    <p:sldId id="257" r:id="rId8"/>
-    <p:sldId id="258" r:id="rId9"/>
-    <p:sldId id="259" r:id="rId10"/>
-    <p:sldId id="260" r:id="rId11"/>
-    <p:sldId id="261" r:id="rId12"/>
-    <p:sldId id="262" r:id="rId13"/>
-    <p:sldId id="263" r:id="rId14"/>
-    <p:sldId id="264" r:id="rId15"/>
-    <p:sldId id="265" r:id="rId16"/>
+    <p:sldId id="256" r:id="rId2"/>
+    <p:sldId id="257" r:id="rId3"/>
+    <p:sldId id="258" r:id="rId4"/>
+    <p:sldId id="259" r:id="rId5"/>
+    <p:sldId id="260" r:id="rId6"/>
+    <p:sldId id="261" r:id="rId7"/>
+    <p:sldId id="262" r:id="rId8"/>
+    <p:sldId id="263" r:id="rId9"/>
+    <p:sldId id="264" r:id="rId10"/>
+    <p:sldId id="265" r:id="rId11"/>
   </p:sldIdLst>
-  <p:sldSz cx="10080000" cy="5670000" type="screen4x3"/>
+  <p:sldSz cx="10080625" cy="5670550"/>
   <p:notesSz cx="6858000" cy="9144000"/>
   <p:defaultTextStyle>
     <a:defPPr>
@@ -113,6 +113,22 @@
       </a:defRPr>
     </a:lvl9pPr>
   </p:defaultTextStyle>
+  <p:extLst>
+    <p:ext uri="{EFAFB233-063F-42B5-8137-9DF3F51BA10A}">
+      <p15:sldGuideLst xmlns:p15="http://schemas.microsoft.com/office/powerpoint/2012/main">
+        <p15:guide id="1" orient="horz" pos="2160">
+          <p15:clr>
+            <a:srgbClr val="A4A3A4"/>
+          </p15:clr>
+        </p15:guide>
+        <p15:guide id="2" pos="2880">
+          <p15:clr>
+            <a:srgbClr val="A4A3A4"/>
+          </p15:clr>
+        </p15:guide>
+      </p15:sldGuideLst>
+    </p:ext>
+  </p:extLst>
 </p:presentation>
 </file>
 
@@ -154,10 +170,9 @@
           <a:lstStyle/>
           <a:p>
             <a:r>
-              <a:rPr lang="en-US" smtClean="0"/>
+              <a:rPr lang="en-US"/>
               <a:t>Click to edit Master title style</a:t>
             </a:r>
-            <a:endParaRPr lang="en-US"/>
           </a:p>
         </p:txBody>
       </p:sp>
@@ -273,10 +288,9 @@
           </a:lstStyle>
           <a:p>
             <a:r>
-              <a:rPr lang="en-US" smtClean="0"/>
+              <a:rPr lang="en-US"/>
               <a:t>Click to edit Master subtitle style</a:t>
             </a:r>
-            <a:endParaRPr lang="en-US"/>
           </a:p>
         </p:txBody>
       </p:sp>
@@ -297,7 +311,7 @@
           <a:p>
             <a:fld id="{5BCAD085-E8A6-8845-BD4E-CB4CCA059FC4}" type="datetimeFigureOut">
               <a:rPr lang="en-US" smtClean="0"/>
-              <a:t>1/27/13</a:t>
+              <a:t>9/24/2026</a:t>
             </a:fld>
             <a:endParaRPr lang="en-US"/>
           </a:p>
@@ -339,7 +353,7 @@
           <a:p>
             <a:fld id="{C1FF6DA9-008F-8B48-92A6-B652298478BF}" type="slidenum">
               <a:rPr lang="en-US" smtClean="0"/>
-              <a:t>‹#›</a:t>
+              <a:t>‹nº›</a:t>
             </a:fld>
             <a:endParaRPr lang="en-US"/>
           </a:p>
@@ -391,10 +405,9 @@
           <a:lstStyle/>
           <a:p>
             <a:r>
-              <a:rPr lang="en-US" smtClean="0"/>
+              <a:rPr lang="en-US"/>
               <a:t>Click to edit Master title style</a:t>
             </a:r>
-            <a:endParaRPr lang="en-US"/>
           </a:p>
         </p:txBody>
       </p:sp>
@@ -415,38 +428,37 @@
           <a:p>
             <a:pPr lvl="0"/>
             <a:r>
-              <a:rPr lang="en-US" smtClean="0"/>
+              <a:rPr lang="en-US"/>
               <a:t>Click to edit Master text styles</a:t>
             </a:r>
           </a:p>
           <a:p>
             <a:pPr lvl="1"/>
             <a:r>
-              <a:rPr lang="en-US" smtClean="0"/>
+              <a:rPr lang="en-US"/>
               <a:t>Second level</a:t>
             </a:r>
           </a:p>
           <a:p>
             <a:pPr lvl="2"/>
             <a:r>
-              <a:rPr lang="en-US" smtClean="0"/>
+              <a:rPr lang="en-US"/>
               <a:t>Third level</a:t>
             </a:r>
           </a:p>
           <a:p>
             <a:pPr lvl="3"/>
             <a:r>
-              <a:rPr lang="en-US" smtClean="0"/>
+              <a:rPr lang="en-US"/>
               <a:t>Fourth level</a:t>
             </a:r>
           </a:p>
           <a:p>
             <a:pPr lvl="4"/>
             <a:r>
-              <a:rPr lang="en-US" smtClean="0"/>
+              <a:rPr lang="en-US"/>
               <a:t>Fifth level</a:t>
             </a:r>
-            <a:endParaRPr lang="en-US"/>
           </a:p>
         </p:txBody>
       </p:sp>
@@ -467,7 +479,7 @@
           <a:p>
             <a:fld id="{5BCAD085-E8A6-8845-BD4E-CB4CCA059FC4}" type="datetimeFigureOut">
               <a:rPr lang="en-US" smtClean="0"/>
-              <a:t>1/27/13</a:t>
+              <a:t>9/24/2026</a:t>
             </a:fld>
             <a:endParaRPr lang="en-US"/>
           </a:p>
@@ -509,7 +521,7 @@
           <a:p>
             <a:fld id="{C1FF6DA9-008F-8B48-92A6-B652298478BF}" type="slidenum">
               <a:rPr lang="en-US" smtClean="0"/>
-              <a:t>‹#›</a:t>
+              <a:t>‹nº›</a:t>
             </a:fld>
             <a:endParaRPr lang="en-US"/>
           </a:p>
@@ -566,10 +578,9 @@
           <a:lstStyle/>
           <a:p>
             <a:r>
-              <a:rPr lang="en-US" smtClean="0"/>
+              <a:rPr lang="en-US"/>
               <a:t>Click to edit Master title style</a:t>
             </a:r>
-            <a:endParaRPr lang="en-US"/>
           </a:p>
         </p:txBody>
       </p:sp>
@@ -595,38 +606,37 @@
           <a:p>
             <a:pPr lvl="0"/>
             <a:r>
-              <a:rPr lang="en-US" smtClean="0"/>
+              <a:rPr lang="en-US"/>
               <a:t>Click to edit Master text styles</a:t>
             </a:r>
           </a:p>
           <a:p>
             <a:pPr lvl="1"/>
             <a:r>
-              <a:rPr lang="en-US" smtClean="0"/>
+              <a:rPr lang="en-US"/>
               <a:t>Second level</a:t>
             </a:r>
           </a:p>
           <a:p>
             <a:pPr lvl="2"/>
             <a:r>
-              <a:rPr lang="en-US" smtClean="0"/>
+              <a:rPr lang="en-US"/>
               <a:t>Third level</a:t>
             </a:r>
           </a:p>
           <a:p>
             <a:pPr lvl="3"/>
             <a:r>
-              <a:rPr lang="en-US" smtClean="0"/>
+              <a:rPr lang="en-US"/>
               <a:t>Fourth level</a:t>
             </a:r>
           </a:p>
           <a:p>
             <a:pPr lvl="4"/>
             <a:r>
-              <a:rPr lang="en-US" smtClean="0"/>
+              <a:rPr lang="en-US"/>
               <a:t>Fifth level</a:t>
             </a:r>
-            <a:endParaRPr lang="en-US"/>
           </a:p>
         </p:txBody>
       </p:sp>
@@ -647,7 +657,7 @@
           <a:p>
             <a:fld id="{5BCAD085-E8A6-8845-BD4E-CB4CCA059FC4}" type="datetimeFigureOut">
               <a:rPr lang="en-US" smtClean="0"/>
-              <a:t>1/27/13</a:t>
+              <a:t>9/24/2026</a:t>
             </a:fld>
             <a:endParaRPr lang="en-US"/>
           </a:p>
@@ -689,7 +699,7 @@
           <a:p>
             <a:fld id="{C1FF6DA9-008F-8B48-92A6-B652298478BF}" type="slidenum">
               <a:rPr lang="en-US" smtClean="0"/>
-              <a:t>‹#›</a:t>
+              <a:t>‹nº›</a:t>
             </a:fld>
             <a:endParaRPr lang="en-US"/>
           </a:p>
@@ -741,10 +751,9 @@
           <a:lstStyle/>
           <a:p>
             <a:r>
-              <a:rPr lang="en-US" smtClean="0"/>
+              <a:rPr lang="en-US"/>
               <a:t>Click to edit Master title style</a:t>
             </a:r>
-            <a:endParaRPr lang="en-US"/>
           </a:p>
         </p:txBody>
       </p:sp>
@@ -765,38 +774,37 @@
           <a:p>
             <a:pPr lvl="0"/>
             <a:r>
-              <a:rPr lang="en-US" smtClean="0"/>
+              <a:rPr lang="en-US"/>
               <a:t>Click to edit Master text styles</a:t>
             </a:r>
           </a:p>
           <a:p>
             <a:pPr lvl="1"/>
             <a:r>
-              <a:rPr lang="en-US" smtClean="0"/>
+              <a:rPr lang="en-US"/>
               <a:t>Second level</a:t>
             </a:r>
           </a:p>
           <a:p>
             <a:pPr lvl="2"/>
             <a:r>
-              <a:rPr lang="en-US" smtClean="0"/>
+              <a:rPr lang="en-US"/>
               <a:t>Third level</a:t>
             </a:r>
           </a:p>
           <a:p>
             <a:pPr lvl="3"/>
             <a:r>
-              <a:rPr lang="en-US" smtClean="0"/>
+              <a:rPr lang="en-US"/>
               <a:t>Fourth level</a:t>
             </a:r>
           </a:p>
           <a:p>
             <a:pPr lvl="4"/>
             <a:r>
-              <a:rPr lang="en-US" smtClean="0"/>
+              <a:rPr lang="en-US"/>
               <a:t>Fifth level</a:t>
             </a:r>
-            <a:endParaRPr lang="en-US"/>
           </a:p>
         </p:txBody>
       </p:sp>
@@ -817,7 +825,7 @@
           <a:p>
             <a:fld id="{5BCAD085-E8A6-8845-BD4E-CB4CCA059FC4}" type="datetimeFigureOut">
               <a:rPr lang="en-US" smtClean="0"/>
-              <a:t>1/27/13</a:t>
+              <a:t>9/24/2026</a:t>
             </a:fld>
             <a:endParaRPr lang="en-US"/>
           </a:p>
@@ -859,7 +867,7 @@
           <a:p>
             <a:fld id="{C1FF6DA9-008F-8B48-92A6-B652298478BF}" type="slidenum">
               <a:rPr lang="en-US" smtClean="0"/>
-              <a:t>‹#›</a:t>
+              <a:t>‹nº›</a:t>
             </a:fld>
             <a:endParaRPr lang="en-US"/>
           </a:p>
@@ -920,10 +928,9 @@
           </a:lstStyle>
           <a:p>
             <a:r>
-              <a:rPr lang="en-US" smtClean="0"/>
+              <a:rPr lang="en-US"/>
               <a:t>Click to edit Master title style</a:t>
             </a:r>
-            <a:endParaRPr lang="en-US"/>
           </a:p>
         </p:txBody>
       </p:sp>
@@ -1040,7 +1047,7 @@
           <a:p>
             <a:pPr lvl="0"/>
             <a:r>
-              <a:rPr lang="en-US" smtClean="0"/>
+              <a:rPr lang="en-US"/>
               <a:t>Click to edit Master text styles</a:t>
             </a:r>
           </a:p>
@@ -1063,7 +1070,7 @@
           <a:p>
             <a:fld id="{5BCAD085-E8A6-8845-BD4E-CB4CCA059FC4}" type="datetimeFigureOut">
               <a:rPr lang="en-US" smtClean="0"/>
-              <a:t>1/27/13</a:t>
+              <a:t>9/24/2026</a:t>
             </a:fld>
             <a:endParaRPr lang="en-US"/>
           </a:p>
@@ -1105,7 +1112,7 @@
           <a:p>
             <a:fld id="{C1FF6DA9-008F-8B48-92A6-B652298478BF}" type="slidenum">
               <a:rPr lang="en-US" smtClean="0"/>
-              <a:t>‹#›</a:t>
+              <a:t>‹nº›</a:t>
             </a:fld>
             <a:endParaRPr lang="en-US"/>
           </a:p>
@@ -1157,10 +1164,9 @@
           <a:lstStyle/>
           <a:p>
             <a:r>
-              <a:rPr lang="en-US" smtClean="0"/>
+              <a:rPr lang="en-US"/>
               <a:t>Click to edit Master title style</a:t>
             </a:r>
-            <a:endParaRPr lang="en-US"/>
           </a:p>
         </p:txBody>
       </p:sp>
@@ -1214,38 +1220,37 @@
           <a:p>
             <a:pPr lvl="0"/>
             <a:r>
-              <a:rPr lang="en-US" smtClean="0"/>
+              <a:rPr lang="en-US"/>
               <a:t>Click to edit Master text styles</a:t>
             </a:r>
           </a:p>
           <a:p>
             <a:pPr lvl="1"/>
             <a:r>
-              <a:rPr lang="en-US" smtClean="0"/>
+              <a:rPr lang="en-US"/>
               <a:t>Second level</a:t>
             </a:r>
           </a:p>
           <a:p>
             <a:pPr lvl="2"/>
             <a:r>
-              <a:rPr lang="en-US" smtClean="0"/>
+              <a:rPr lang="en-US"/>
               <a:t>Third level</a:t>
             </a:r>
           </a:p>
           <a:p>
             <a:pPr lvl="3"/>
             <a:r>
-              <a:rPr lang="en-US" smtClean="0"/>
+              <a:rPr lang="en-US"/>
               <a:t>Fourth level</a:t>
             </a:r>
           </a:p>
           <a:p>
             <a:pPr lvl="4"/>
             <a:r>
-              <a:rPr lang="en-US" smtClean="0"/>
+              <a:rPr lang="en-US"/>
               <a:t>Fifth level</a:t>
             </a:r>
-            <a:endParaRPr lang="en-US"/>
           </a:p>
         </p:txBody>
       </p:sp>
@@ -1299,38 +1304,37 @@
           <a:p>
             <a:pPr lvl="0"/>
             <a:r>
-              <a:rPr lang="en-US" smtClean="0"/>
+              <a:rPr lang="en-US"/>
               <a:t>Click to edit Master text styles</a:t>
             </a:r>
           </a:p>
           <a:p>
             <a:pPr lvl="1"/>
             <a:r>
-              <a:rPr lang="en-US" smtClean="0"/>
+              <a:rPr lang="en-US"/>
               <a:t>Second level</a:t>
             </a:r>
           </a:p>
           <a:p>
             <a:pPr lvl="2"/>
             <a:r>
-              <a:rPr lang="en-US" smtClean="0"/>
+              <a:rPr lang="en-US"/>
               <a:t>Third level</a:t>
             </a:r>
           </a:p>
           <a:p>
             <a:pPr lvl="3"/>
             <a:r>
-              <a:rPr lang="en-US" smtClean="0"/>
+              <a:rPr lang="en-US"/>
               <a:t>Fourth level</a:t>
             </a:r>
           </a:p>
           <a:p>
             <a:pPr lvl="4"/>
             <a:r>
-              <a:rPr lang="en-US" smtClean="0"/>
+              <a:rPr lang="en-US"/>
               <a:t>Fifth level</a:t>
             </a:r>
-            <a:endParaRPr lang="en-US"/>
           </a:p>
         </p:txBody>
       </p:sp>
@@ -1351,7 +1355,7 @@
           <a:p>
             <a:fld id="{5BCAD085-E8A6-8845-BD4E-CB4CCA059FC4}" type="datetimeFigureOut">
               <a:rPr lang="en-US" smtClean="0"/>
-              <a:t>1/27/13</a:t>
+              <a:t>9/24/2026</a:t>
             </a:fld>
             <a:endParaRPr lang="en-US"/>
           </a:p>
@@ -1393,7 +1397,7 @@
           <a:p>
             <a:fld id="{C1FF6DA9-008F-8B48-92A6-B652298478BF}" type="slidenum">
               <a:rPr lang="en-US" smtClean="0"/>
-              <a:t>‹#›</a:t>
+              <a:t>‹nº›</a:t>
             </a:fld>
             <a:endParaRPr lang="en-US"/>
           </a:p>
@@ -1449,10 +1453,9 @@
           </a:lstStyle>
           <a:p>
             <a:r>
-              <a:rPr lang="en-US" smtClean="0"/>
+              <a:rPr lang="en-US"/>
               <a:t>Click to edit Master title style</a:t>
             </a:r>
-            <a:endParaRPr lang="en-US"/>
           </a:p>
         </p:txBody>
       </p:sp>
@@ -1515,7 +1518,7 @@
           <a:p>
             <a:pPr lvl="0"/>
             <a:r>
-              <a:rPr lang="en-US" smtClean="0"/>
+              <a:rPr lang="en-US"/>
               <a:t>Click to edit Master text styles</a:t>
             </a:r>
           </a:p>
@@ -1571,38 +1574,37 @@
           <a:p>
             <a:pPr lvl="0"/>
             <a:r>
-              <a:rPr lang="en-US" smtClean="0"/>
+              <a:rPr lang="en-US"/>
               <a:t>Click to edit Master text styles</a:t>
             </a:r>
           </a:p>
           <a:p>
             <a:pPr lvl="1"/>
             <a:r>
-              <a:rPr lang="en-US" smtClean="0"/>
+              <a:rPr lang="en-US"/>
               <a:t>Second level</a:t>
             </a:r>
           </a:p>
           <a:p>
             <a:pPr lvl="2"/>
             <a:r>
-              <a:rPr lang="en-US" smtClean="0"/>
+              <a:rPr lang="en-US"/>
               <a:t>Third level</a:t>
             </a:r>
           </a:p>
           <a:p>
             <a:pPr lvl="3"/>
             <a:r>
-              <a:rPr lang="en-US" smtClean="0"/>
+              <a:rPr lang="en-US"/>
               <a:t>Fourth level</a:t>
             </a:r>
           </a:p>
           <a:p>
             <a:pPr lvl="4"/>
             <a:r>
-              <a:rPr lang="en-US" smtClean="0"/>
+              <a:rPr lang="en-US"/>
               <a:t>Fifth level</a:t>
             </a:r>
-            <a:endParaRPr lang="en-US"/>
           </a:p>
         </p:txBody>
       </p:sp>
@@ -1665,7 +1667,7 @@
           <a:p>
             <a:pPr lvl="0"/>
             <a:r>
-              <a:rPr lang="en-US" smtClean="0"/>
+              <a:rPr lang="en-US"/>
               <a:t>Click to edit Master text styles</a:t>
             </a:r>
           </a:p>
@@ -1721,38 +1723,37 @@
           <a:p>
             <a:pPr lvl="0"/>
             <a:r>
-              <a:rPr lang="en-US" smtClean="0"/>
+              <a:rPr lang="en-US"/>
               <a:t>Click to edit Master text styles</a:t>
             </a:r>
           </a:p>
           <a:p>
             <a:pPr lvl="1"/>
             <a:r>
-              <a:rPr lang="en-US" smtClean="0"/>
+              <a:rPr lang="en-US"/>
               <a:t>Second level</a:t>
             </a:r>
           </a:p>
           <a:p>
             <a:pPr lvl="2"/>
             <a:r>
-              <a:rPr lang="en-US" smtClean="0"/>
+              <a:rPr lang="en-US"/>
               <a:t>Third level</a:t>
             </a:r>
           </a:p>
           <a:p>
             <a:pPr lvl="3"/>
             <a:r>
-              <a:rPr lang="en-US" smtClean="0"/>
+              <a:rPr lang="en-US"/>
               <a:t>Fourth level</a:t>
             </a:r>
           </a:p>
           <a:p>
             <a:pPr lvl="4"/>
             <a:r>
-              <a:rPr lang="en-US" smtClean="0"/>
+              <a:rPr lang="en-US"/>
               <a:t>Fifth level</a:t>
             </a:r>
-            <a:endParaRPr lang="en-US"/>
           </a:p>
         </p:txBody>
       </p:sp>
@@ -1773,7 +1774,7 @@
           <a:p>
             <a:fld id="{5BCAD085-E8A6-8845-BD4E-CB4CCA059FC4}" type="datetimeFigureOut">
               <a:rPr lang="en-US" smtClean="0"/>
-              <a:t>1/27/13</a:t>
+              <a:t>9/24/2026</a:t>
             </a:fld>
             <a:endParaRPr lang="en-US"/>
           </a:p>
@@ -1815,7 +1816,7 @@
           <a:p>
             <a:fld id="{C1FF6DA9-008F-8B48-92A6-B652298478BF}" type="slidenum">
               <a:rPr lang="en-US" smtClean="0"/>
-              <a:t>‹#›</a:t>
+              <a:t>‹nº›</a:t>
             </a:fld>
             <a:endParaRPr lang="en-US"/>
           </a:p>
@@ -1867,10 +1868,9 @@
           <a:lstStyle/>
           <a:p>
             <a:r>
-              <a:rPr lang="en-US" smtClean="0"/>
+              <a:rPr lang="en-US"/>
               <a:t>Click to edit Master title style</a:t>
             </a:r>
-            <a:endParaRPr lang="en-US"/>
           </a:p>
         </p:txBody>
       </p:sp>
@@ -1891,7 +1891,7 @@
           <a:p>
             <a:fld id="{5BCAD085-E8A6-8845-BD4E-CB4CCA059FC4}" type="datetimeFigureOut">
               <a:rPr lang="en-US" smtClean="0"/>
-              <a:t>1/27/13</a:t>
+              <a:t>9/24/2026</a:t>
             </a:fld>
             <a:endParaRPr lang="en-US"/>
           </a:p>
@@ -1933,7 +1933,7 @@
           <a:p>
             <a:fld id="{C1FF6DA9-008F-8B48-92A6-B652298478BF}" type="slidenum">
               <a:rPr lang="en-US" smtClean="0"/>
-              <a:t>‹#›</a:t>
+              <a:t>‹nº›</a:t>
             </a:fld>
             <a:endParaRPr lang="en-US"/>
           </a:p>
@@ -1986,7 +1986,7 @@
           <a:p>
             <a:fld id="{5BCAD085-E8A6-8845-BD4E-CB4CCA059FC4}" type="datetimeFigureOut">
               <a:rPr lang="en-US" smtClean="0"/>
-              <a:t>1/27/13</a:t>
+              <a:t>9/24/2026</a:t>
             </a:fld>
             <a:endParaRPr lang="en-US"/>
           </a:p>
@@ -2028,7 +2028,7 @@
           <a:p>
             <a:fld id="{C1FF6DA9-008F-8B48-92A6-B652298478BF}" type="slidenum">
               <a:rPr lang="en-US" smtClean="0"/>
-              <a:t>‹#›</a:t>
+              <a:t>‹nº›</a:t>
             </a:fld>
             <a:endParaRPr lang="en-US"/>
           </a:p>
@@ -2089,10 +2089,9 @@
           </a:lstStyle>
           <a:p>
             <a:r>
-              <a:rPr lang="en-US" smtClean="0"/>
+              <a:rPr lang="en-US"/>
               <a:t>Click to edit Master title style</a:t>
             </a:r>
-            <a:endParaRPr lang="en-US"/>
           </a:p>
         </p:txBody>
       </p:sp>
@@ -2146,38 +2145,37 @@
           <a:p>
             <a:pPr lvl="0"/>
             <a:r>
-              <a:rPr lang="en-US" smtClean="0"/>
+              <a:rPr lang="en-US"/>
               <a:t>Click to edit Master text styles</a:t>
             </a:r>
           </a:p>
           <a:p>
             <a:pPr lvl="1"/>
             <a:r>
-              <a:rPr lang="en-US" smtClean="0"/>
+              <a:rPr lang="en-US"/>
               <a:t>Second level</a:t>
             </a:r>
           </a:p>
           <a:p>
             <a:pPr lvl="2"/>
             <a:r>
-              <a:rPr lang="en-US" smtClean="0"/>
+              <a:rPr lang="en-US"/>
               <a:t>Third level</a:t>
             </a:r>
           </a:p>
           <a:p>
             <a:pPr lvl="3"/>
             <a:r>
-              <a:rPr lang="en-US" smtClean="0"/>
+              <a:rPr lang="en-US"/>
               <a:t>Fourth level</a:t>
             </a:r>
           </a:p>
           <a:p>
             <a:pPr lvl="4"/>
             <a:r>
-              <a:rPr lang="en-US" smtClean="0"/>
+              <a:rPr lang="en-US"/>
               <a:t>Fifth level</a:t>
             </a:r>
-            <a:endParaRPr lang="en-US"/>
           </a:p>
         </p:txBody>
       </p:sp>
@@ -2240,7 +2238,7 @@
           <a:p>
             <a:pPr lvl="0"/>
             <a:r>
-              <a:rPr lang="en-US" smtClean="0"/>
+              <a:rPr lang="en-US"/>
               <a:t>Click to edit Master text styles</a:t>
             </a:r>
           </a:p>
@@ -2263,7 +2261,7 @@
           <a:p>
             <a:fld id="{5BCAD085-E8A6-8845-BD4E-CB4CCA059FC4}" type="datetimeFigureOut">
               <a:rPr lang="en-US" smtClean="0"/>
-              <a:t>1/27/13</a:t>
+              <a:t>9/24/2026</a:t>
             </a:fld>
             <a:endParaRPr lang="en-US"/>
           </a:p>
@@ -2305,7 +2303,7 @@
           <a:p>
             <a:fld id="{C1FF6DA9-008F-8B48-92A6-B652298478BF}" type="slidenum">
               <a:rPr lang="en-US" smtClean="0"/>
-              <a:t>‹#›</a:t>
+              <a:t>‹nº›</a:t>
             </a:fld>
             <a:endParaRPr lang="en-US"/>
           </a:p>
@@ -2366,10 +2364,9 @@
           </a:lstStyle>
           <a:p>
             <a:r>
-              <a:rPr lang="en-US" smtClean="0"/>
+              <a:rPr lang="en-US"/>
               <a:t>Click to edit Master title style</a:t>
             </a:r>
-            <a:endParaRPr lang="en-US"/>
           </a:p>
         </p:txBody>
       </p:sp>
@@ -2493,7 +2490,7 @@
           <a:p>
             <a:pPr lvl="0"/>
             <a:r>
-              <a:rPr lang="en-US" smtClean="0"/>
+              <a:rPr lang="en-US"/>
               <a:t>Click to edit Master text styles</a:t>
             </a:r>
           </a:p>
@@ -2516,7 +2513,7 @@
           <a:p>
             <a:fld id="{5BCAD085-E8A6-8845-BD4E-CB4CCA059FC4}" type="datetimeFigureOut">
               <a:rPr lang="en-US" smtClean="0"/>
-              <a:t>1/27/13</a:t>
+              <a:t>9/24/2026</a:t>
             </a:fld>
             <a:endParaRPr lang="en-US"/>
           </a:p>
@@ -2558,7 +2555,7 @@
           <a:p>
             <a:fld id="{C1FF6DA9-008F-8B48-92A6-B652298478BF}" type="slidenum">
               <a:rPr lang="en-US" smtClean="0"/>
-              <a:t>‹#›</a:t>
+              <a:t>‹nº›</a:t>
             </a:fld>
             <a:endParaRPr lang="en-US"/>
           </a:p>
@@ -2625,10 +2622,9 @@
           <a:lstStyle/>
           <a:p>
             <a:r>
-              <a:rPr lang="en-US" smtClean="0"/>
+              <a:rPr lang="en-US"/>
               <a:t>Click to edit Master title style</a:t>
             </a:r>
-            <a:endParaRPr lang="en-US"/>
           </a:p>
         </p:txBody>
       </p:sp>
@@ -2659,38 +2655,37 @@
           <a:p>
             <a:pPr lvl="0"/>
             <a:r>
-              <a:rPr lang="en-US" smtClean="0"/>
+              <a:rPr lang="en-US"/>
               <a:t>Click to edit Master text styles</a:t>
             </a:r>
           </a:p>
           <a:p>
             <a:pPr lvl="1"/>
             <a:r>
-              <a:rPr lang="en-US" smtClean="0"/>
+              <a:rPr lang="en-US"/>
               <a:t>Second level</a:t>
             </a:r>
           </a:p>
           <a:p>
             <a:pPr lvl="2"/>
             <a:r>
-              <a:rPr lang="en-US" smtClean="0"/>
+              <a:rPr lang="en-US"/>
               <a:t>Third level</a:t>
             </a:r>
           </a:p>
           <a:p>
             <a:pPr lvl="3"/>
             <a:r>
-              <a:rPr lang="en-US" smtClean="0"/>
+              <a:rPr lang="en-US"/>
               <a:t>Fourth level</a:t>
             </a:r>
           </a:p>
           <a:p>
             <a:pPr lvl="4"/>
             <a:r>
-              <a:rPr lang="en-US" smtClean="0"/>
+              <a:rPr lang="en-US"/>
               <a:t>Fifth level</a:t>
             </a:r>
-            <a:endParaRPr lang="en-US"/>
           </a:p>
         </p:txBody>
       </p:sp>
@@ -2729,7 +2724,7 @@
           <a:p>
             <a:fld id="{5BCAD085-E8A6-8845-BD4E-CB4CCA059FC4}" type="datetimeFigureOut">
               <a:rPr lang="en-US" smtClean="0"/>
-              <a:t>1/27/13</a:t>
+              <a:t>9/24/2026</a:t>
             </a:fld>
             <a:endParaRPr lang="en-US"/>
           </a:p>
@@ -2807,7 +2802,7 @@
           <a:p>
             <a:fld id="{C1FF6DA9-008F-8B48-92A6-B652298478BF}" type="slidenum">
               <a:rPr lang="en-US" smtClean="0"/>
-              <a:t>‹#›</a:t>
+              <a:t>‹nº›</a:t>
             </a:fld>
             <a:endParaRPr lang="en-US"/>
           </a:p>
@@ -3088,7 +3083,7 @@
 </file>
 
 <file path=ppt/slides/slide1.xml><?xml version="1.0" encoding="utf-8"?>
-<p:sld xmlns:a="http://schemas.openxmlformats.org/drawingml/2006/main" xmlns:p="http://schemas.openxmlformats.org/presentationml/2006/main" xmlns:r="http://schemas.openxmlformats.org/officeDocument/2006/relationships">
+<p:sld xmlns:a="http://schemas.openxmlformats.org/drawingml/2006/main" xmlns:r="http://schemas.openxmlformats.org/officeDocument/2006/relationships" xmlns:p="http://schemas.openxmlformats.org/presentationml/2006/main">
   <p:cSld>
     <p:spTree>
       <p:nvGrpSpPr>
@@ -3096,7 +3091,14 @@
         <p:cNvGrpSpPr/>
         <p:nvPr/>
       </p:nvGrpSpPr>
-      <p:grpSpPr/>
+      <p:grpSpPr>
+        <a:xfrm>
+          <a:off x="0" y="0"/>
+          <a:ext cx="0" cy="0"/>
+          <a:chOff x="0" y="0"/>
+          <a:chExt cx="0" cy="0"/>
+        </a:xfrm>
+      </p:grpSpPr>
       <p:sp>
         <p:nvSpPr>
           <p:cNvPr id="2" name="Rectangle 1"/>
@@ -3138,6 +3140,7 @@
           <a:lstStyle/>
           <a:p>
             <a:pPr algn="ctr"/>
+            <a:endParaRPr/>
           </a:p>
         </p:txBody>
       </p:sp>
@@ -3150,7 +3153,7 @@
         <p:spPr>
           <a:xfrm>
             <a:off x="360000" y="251999"/>
-            <a:ext cx="9360000" cy="540000"/>
+            <a:ext cx="9360000" cy="400110"/>
           </a:xfrm>
           <a:prstGeom prst="rect">
             <a:avLst/>
@@ -3164,23 +3167,65 @@
           <a:lstStyle/>
           <a:p>
             <a:r>
-              <a:rPr sz="1400">
-                <a:solidFill>
-                  <a:srgbClr val="8A929B"/>
-                </a:solidFill>
-                <a:latin typeface="Consolas"/>
+              <a:rPr sz="2000" b="1" dirty="0">
+                <a:solidFill>
+                  <a:srgbClr val="0E5C68"/>
+                </a:solidFill>
+                <a:latin typeface="Arial"/>
               </a:rPr>
               <a:t>01  </a:t>
             </a:r>
             <a:r>
-              <a:rPr sz="2600" b="1">
+              <a:rPr sz="2000" b="1" dirty="0" err="1">
                 <a:solidFill>
                   <a:srgbClr val="0E5C68"/>
                 </a:solidFill>
                 <a:latin typeface="Arial"/>
               </a:rPr>
-              <a:t>Robustez da Sintonia PI — Objetivo e Condições</a:t>
-            </a:r>
+              <a:t>Sintonia</a:t>
+            </a:r>
+            <a:r>
+              <a:rPr sz="2000" b="1" dirty="0">
+                <a:solidFill>
+                  <a:srgbClr val="0E5C68"/>
+                </a:solidFill>
+                <a:latin typeface="Arial"/>
+              </a:rPr>
+              <a:t> PI — </a:t>
+            </a:r>
+            <a:r>
+              <a:rPr sz="2000" b="1" dirty="0" err="1">
+                <a:solidFill>
+                  <a:srgbClr val="0E5C68"/>
+                </a:solidFill>
+                <a:latin typeface="Arial"/>
+              </a:rPr>
+              <a:t>Objetivo</a:t>
+            </a:r>
+            <a:r>
+              <a:rPr sz="2000" b="1" dirty="0">
+                <a:solidFill>
+                  <a:srgbClr val="0E5C68"/>
+                </a:solidFill>
+                <a:latin typeface="Arial"/>
+              </a:rPr>
+              <a:t> e </a:t>
+            </a:r>
+            <a:r>
+              <a:rPr sz="2000" b="1" dirty="0" err="1">
+                <a:solidFill>
+                  <a:srgbClr val="0E5C68"/>
+                </a:solidFill>
+                <a:latin typeface="Arial"/>
+              </a:rPr>
+              <a:t>Condições</a:t>
+            </a:r>
+            <a:endParaRPr sz="2000" b="1" dirty="0">
+              <a:solidFill>
+                <a:srgbClr val="0E5C68"/>
+              </a:solidFill>
+              <a:latin typeface="Arial"/>
+            </a:endParaRPr>
           </a:p>
         </p:txBody>
       </p:sp>
@@ -3207,13 +3252,292 @@
           <a:lstStyle/>
           <a:p>
             <a:r>
-              <a:rPr sz="1400" b="0" i="0">
+              <a:rPr sz="1400" b="0" i="0" dirty="0" err="1">
                 <a:solidFill>
                   <a:srgbClr val="5B6672"/>
                 </a:solidFill>
                 <a:latin typeface="Arial"/>
               </a:rPr>
-              <a:t>Comparação entre acionamento V/F e FOC (cada um com sua própria sintonia de controlador, sem reajuste manual) sob degrau de carga, em dois motores de porte muito diferente.</a:t>
+              <a:t>Comparação</a:t>
+            </a:r>
+            <a:r>
+              <a:rPr sz="1400" b="0" i="0" dirty="0">
+                <a:solidFill>
+                  <a:srgbClr val="5B6672"/>
+                </a:solidFill>
+                <a:latin typeface="Arial"/>
+              </a:rPr>
+              <a:t> entre </a:t>
+            </a:r>
+            <a:r>
+              <a:rPr sz="1400" b="0" i="0" dirty="0" err="1">
+                <a:solidFill>
+                  <a:srgbClr val="5B6672"/>
+                </a:solidFill>
+                <a:latin typeface="Arial"/>
+              </a:rPr>
+              <a:t>acionamento</a:t>
+            </a:r>
+            <a:r>
+              <a:rPr sz="1400" b="0" i="0" dirty="0">
+                <a:solidFill>
+                  <a:srgbClr val="5B6672"/>
+                </a:solidFill>
+                <a:latin typeface="Arial"/>
+              </a:rPr>
+              <a:t> V/F e FOC (</a:t>
+            </a:r>
+            <a:r>
+              <a:rPr sz="1400" b="0" i="0" dirty="0" err="1">
+                <a:solidFill>
+                  <a:srgbClr val="5B6672"/>
+                </a:solidFill>
+                <a:latin typeface="Arial"/>
+              </a:rPr>
+              <a:t>cada</a:t>
+            </a:r>
+            <a:r>
+              <a:rPr sz="1400" b="0" i="0" dirty="0">
+                <a:solidFill>
+                  <a:srgbClr val="5B6672"/>
+                </a:solidFill>
+                <a:latin typeface="Arial"/>
+              </a:rPr>
+              <a:t> um com </a:t>
+            </a:r>
+            <a:r>
+              <a:rPr sz="1400" b="0" i="0" dirty="0" err="1">
+                <a:solidFill>
+                  <a:srgbClr val="5B6672"/>
+                </a:solidFill>
+                <a:latin typeface="Arial"/>
+              </a:rPr>
+              <a:t>sua</a:t>
+            </a:r>
+            <a:r>
+              <a:rPr sz="1400" b="0" i="0" dirty="0">
+                <a:solidFill>
+                  <a:srgbClr val="5B6672"/>
+                </a:solidFill>
+                <a:latin typeface="Arial"/>
+              </a:rPr>
+              <a:t> </a:t>
+            </a:r>
+            <a:r>
+              <a:rPr sz="1400" b="0" i="0" dirty="0" err="1">
+                <a:solidFill>
+                  <a:srgbClr val="5B6672"/>
+                </a:solidFill>
+                <a:latin typeface="Arial"/>
+              </a:rPr>
+              <a:t>própria</a:t>
+            </a:r>
+            <a:r>
+              <a:rPr sz="1400" b="0" i="0" dirty="0">
+                <a:solidFill>
+                  <a:srgbClr val="5B6672"/>
+                </a:solidFill>
+                <a:latin typeface="Arial"/>
+              </a:rPr>
+              <a:t> </a:t>
+            </a:r>
+            <a:r>
+              <a:rPr sz="1400" b="0" i="0" dirty="0" err="1">
+                <a:solidFill>
+                  <a:srgbClr val="5B6672"/>
+                </a:solidFill>
+                <a:latin typeface="Arial"/>
+              </a:rPr>
+              <a:t>sintonia</a:t>
+            </a:r>
+            <a:r>
+              <a:rPr sz="1400" b="0" i="0" dirty="0">
+                <a:solidFill>
+                  <a:srgbClr val="5B6672"/>
+                </a:solidFill>
+                <a:latin typeface="Arial"/>
+              </a:rPr>
+              <a:t> de </a:t>
+            </a:r>
+            <a:r>
+              <a:rPr sz="1400" b="0" i="0" dirty="0" err="1">
+                <a:solidFill>
+                  <a:srgbClr val="5B6672"/>
+                </a:solidFill>
+                <a:latin typeface="Arial"/>
+              </a:rPr>
+              <a:t>controlador</a:t>
+            </a:r>
+            <a:r>
+              <a:rPr sz="1400" b="0" i="0" dirty="0">
+                <a:solidFill>
+                  <a:srgbClr val="5B6672"/>
+                </a:solidFill>
+                <a:latin typeface="Arial"/>
+              </a:rPr>
+              <a:t>, </a:t>
+            </a:r>
+            <a:r>
+              <a:rPr sz="1400" b="0" i="0" dirty="0" err="1">
+                <a:solidFill>
+                  <a:srgbClr val="5B6672"/>
+                </a:solidFill>
+                <a:latin typeface="Arial"/>
+              </a:rPr>
+              <a:t>sem</a:t>
+            </a:r>
+            <a:r>
+              <a:rPr sz="1400" b="0" i="0" dirty="0">
+                <a:solidFill>
+                  <a:srgbClr val="5B6672"/>
+                </a:solidFill>
+                <a:latin typeface="Arial"/>
+              </a:rPr>
+              <a:t> </a:t>
+            </a:r>
+            <a:r>
+              <a:rPr sz="1400" b="0" i="0" dirty="0" err="1">
+                <a:solidFill>
+                  <a:srgbClr val="5B6672"/>
+                </a:solidFill>
+                <a:latin typeface="Arial"/>
+              </a:rPr>
+              <a:t>reajuste</a:t>
+            </a:r>
+            <a:r>
+              <a:rPr sz="1400" b="0" i="0" dirty="0">
+                <a:solidFill>
+                  <a:srgbClr val="5B6672"/>
+                </a:solidFill>
+                <a:latin typeface="Arial"/>
+              </a:rPr>
+              <a:t> manual) sob </a:t>
+            </a:r>
+            <a:r>
+              <a:rPr sz="1400" b="0" i="0" dirty="0" err="1">
+                <a:solidFill>
+                  <a:srgbClr val="5B6672"/>
+                </a:solidFill>
+                <a:latin typeface="Arial"/>
+              </a:rPr>
+              <a:t>degrau</a:t>
+            </a:r>
+            <a:r>
+              <a:rPr sz="1400" b="0" i="0" dirty="0">
+                <a:solidFill>
+                  <a:srgbClr val="5B6672"/>
+                </a:solidFill>
+                <a:latin typeface="Arial"/>
+              </a:rPr>
+              <a:t> de carga, </a:t>
+            </a:r>
+            <a:r>
+              <a:rPr sz="1400" b="0" i="0" dirty="0" err="1">
+                <a:solidFill>
+                  <a:srgbClr val="5B6672"/>
+                </a:solidFill>
+                <a:latin typeface="Arial"/>
+              </a:rPr>
+              <a:t>em</a:t>
+            </a:r>
+            <a:r>
+              <a:rPr sz="1400" b="0" i="0" dirty="0">
+                <a:solidFill>
+                  <a:srgbClr val="5B6672"/>
+                </a:solidFill>
+                <a:latin typeface="Arial"/>
+              </a:rPr>
+              <a:t> </a:t>
+            </a:r>
+            <a:r>
+              <a:rPr sz="1400" b="0" i="0" dirty="0" err="1">
+                <a:solidFill>
+                  <a:srgbClr val="5B6672"/>
+                </a:solidFill>
+                <a:latin typeface="Arial"/>
+              </a:rPr>
+              <a:t>dois</a:t>
+            </a:r>
+            <a:r>
+              <a:rPr sz="1400" b="0" i="0" dirty="0">
+                <a:solidFill>
+                  <a:srgbClr val="5B6672"/>
+                </a:solidFill>
+                <a:latin typeface="Arial"/>
+              </a:rPr>
+              <a:t> </a:t>
+            </a:r>
+            <a:r>
+              <a:rPr sz="1400" b="0" i="0" dirty="0" err="1">
+                <a:solidFill>
+                  <a:srgbClr val="5B6672"/>
+                </a:solidFill>
+                <a:latin typeface="Arial"/>
+              </a:rPr>
+              <a:t>motores</a:t>
+            </a:r>
+            <a:r>
+              <a:rPr sz="1400" b="0" i="0" dirty="0">
+                <a:solidFill>
+                  <a:srgbClr val="5B6672"/>
+                </a:solidFill>
+                <a:latin typeface="Arial"/>
+              </a:rPr>
+              <a:t> de </a:t>
+            </a:r>
+            <a:r>
+              <a:rPr sz="1400" b="0" i="0" dirty="0" err="1">
+                <a:solidFill>
+                  <a:srgbClr val="5B6672"/>
+                </a:solidFill>
+                <a:latin typeface="Arial"/>
+              </a:rPr>
+              <a:t>porte</a:t>
+            </a:r>
+            <a:r>
+              <a:rPr sz="1400" b="0" i="0" dirty="0">
+                <a:solidFill>
+                  <a:srgbClr val="5B6672"/>
+                </a:solidFill>
+                <a:latin typeface="Arial"/>
+              </a:rPr>
+              <a:t> </a:t>
+            </a:r>
+            <a:r>
+              <a:rPr sz="1400" b="0" i="0" dirty="0" err="1">
+                <a:solidFill>
+                  <a:srgbClr val="5B6672"/>
+                </a:solidFill>
+                <a:latin typeface="Arial"/>
+              </a:rPr>
+              <a:t>muito</a:t>
+            </a:r>
+            <a:r>
+              <a:rPr sz="1400" b="0" i="0" dirty="0">
+                <a:solidFill>
+                  <a:srgbClr val="5B6672"/>
+                </a:solidFill>
+                <a:latin typeface="Arial"/>
+              </a:rPr>
+              <a:t> </a:t>
+            </a:r>
+            <a:r>
+              <a:rPr sz="1400" b="0" i="0" dirty="0" err="1">
+                <a:solidFill>
+                  <a:srgbClr val="5B6672"/>
+                </a:solidFill>
+                <a:latin typeface="Arial"/>
+              </a:rPr>
+              <a:t>diferente</a:t>
+            </a:r>
+            <a:r>
+              <a:rPr sz="1400" b="0" i="0" dirty="0">
+                <a:solidFill>
+                  <a:srgbClr val="5B6672"/>
+                </a:solidFill>
+                <a:latin typeface="Arial"/>
+              </a:rPr>
+              <a:t>.</a:t>
             </a:r>
           </a:p>
         </p:txBody>
@@ -3251,7 +3575,7 @@
 </file>
 
 <file path=ppt/slides/slide10.xml><?xml version="1.0" encoding="utf-8"?>
-<p:sld xmlns:a="http://schemas.openxmlformats.org/drawingml/2006/main" xmlns:p="http://schemas.openxmlformats.org/presentationml/2006/main" xmlns:r="http://schemas.openxmlformats.org/officeDocument/2006/relationships">
+<p:sld xmlns:a="http://schemas.openxmlformats.org/drawingml/2006/main" xmlns:r="http://schemas.openxmlformats.org/officeDocument/2006/relationships" xmlns:p="http://schemas.openxmlformats.org/presentationml/2006/main">
   <p:cSld>
     <p:spTree>
       <p:nvGrpSpPr>
@@ -3259,7 +3583,14 @@
         <p:cNvGrpSpPr/>
         <p:nvPr/>
       </p:nvGrpSpPr>
-      <p:grpSpPr/>
+      <p:grpSpPr>
+        <a:xfrm>
+          <a:off x="0" y="0"/>
+          <a:ext cx="0" cy="0"/>
+          <a:chOff x="0" y="0"/>
+          <a:chExt cx="0" cy="0"/>
+        </a:xfrm>
+      </p:grpSpPr>
       <p:sp>
         <p:nvSpPr>
           <p:cNvPr id="2" name="Rectangle 1"/>
@@ -3301,6 +3632,7 @@
           <a:lstStyle/>
           <a:p>
             <a:pPr algn="ctr"/>
+            <a:endParaRPr/>
           </a:p>
         </p:txBody>
       </p:sp>
@@ -3324,25 +3656,39 @@
           <a:bodyPr wrap="square">
             <a:spAutoFit/>
           </a:bodyPr>
-          <a:lstStyle/>
-          <a:p>
-            <a:r>
-              <a:rPr sz="1400">
-                <a:solidFill>
-                  <a:srgbClr val="8A929B"/>
-                </a:solidFill>
-                <a:latin typeface="Consolas"/>
-              </a:rPr>
+          <a:lstStyle>
+            <a:defPPr>
+              <a:defRPr lang="en-US"/>
+            </a:defPPr>
+            <a:lvl1pPr>
+              <a:defRPr sz="2000" b="1">
+                <a:solidFill>
+                  <a:srgbClr val="0E5C68"/>
+                </a:solidFill>
+                <a:latin typeface="Arial"/>
+              </a:defRPr>
+            </a:lvl1pPr>
+          </a:lstStyle>
+          <a:p>
+            <a:r>
+              <a:rPr dirty="0"/>
               <a:t>10  </a:t>
             </a:r>
             <a:r>
-              <a:rPr sz="2600" b="1">
-                <a:solidFill>
-                  <a:srgbClr val="0E5C68"/>
-                </a:solidFill>
-                <a:latin typeface="Arial"/>
-              </a:rPr>
-              <a:t>Veredito de Robustez e Próximos Passos</a:t>
+              <a:rPr lang="pt-BR" dirty="0"/>
+              <a:t>Análise </a:t>
+            </a:r>
+            <a:r>
+              <a:rPr dirty="0"/>
+              <a:t>e </a:t>
+            </a:r>
+            <a:r>
+              <a:rPr dirty="0" err="1"/>
+              <a:t>Próximos</a:t>
+            </a:r>
+            <a:r>
+              <a:rPr dirty="0"/>
+              <a:t> Passos</a:t>
             </a:r>
           </a:p>
         </p:txBody>
@@ -3356,7 +3702,7 @@
         <p:spPr>
           <a:xfrm>
             <a:off x="360000" y="864000"/>
-            <a:ext cx="9360000" cy="3960000"/>
+            <a:ext cx="9360000" cy="3503523"/>
           </a:xfrm>
           <a:prstGeom prst="rect">
             <a:avLst/>
@@ -3375,13 +3721,319 @@
               </a:spcAft>
             </a:pPr>
             <a:r>
-              <a:rPr sz="1500">
-                <a:solidFill>
-                  <a:srgbClr val="1A2027"/>
-                </a:solidFill>
-                <a:latin typeface="Arial"/>
-              </a:rPr>
-              <a:t>•  O FOC praticamente elimina o desvio de velocidade sob carga (erro de regime próximo de zero) em todos os motores e condições testados; o V/F apresenta desvio permanente por escorregamento.</a:t>
+              <a:rPr sz="1500" dirty="0">
+                <a:solidFill>
+                  <a:srgbClr val="1A2027"/>
+                </a:solidFill>
+                <a:latin typeface="Arial"/>
+              </a:rPr>
+              <a:t>•  O FOC </a:t>
+            </a:r>
+            <a:r>
+              <a:rPr sz="1500" dirty="0" err="1">
+                <a:solidFill>
+                  <a:srgbClr val="1A2027"/>
+                </a:solidFill>
+                <a:latin typeface="Arial"/>
+              </a:rPr>
+              <a:t>praticamente</a:t>
+            </a:r>
+            <a:r>
+              <a:rPr sz="1500" dirty="0">
+                <a:solidFill>
+                  <a:srgbClr val="1A2027"/>
+                </a:solidFill>
+                <a:latin typeface="Arial"/>
+              </a:rPr>
+              <a:t> </a:t>
+            </a:r>
+            <a:r>
+              <a:rPr sz="1500" dirty="0" err="1">
+                <a:solidFill>
+                  <a:srgbClr val="1A2027"/>
+                </a:solidFill>
+                <a:latin typeface="Arial"/>
+              </a:rPr>
+              <a:t>elimina</a:t>
+            </a:r>
+            <a:r>
+              <a:rPr sz="1500" dirty="0">
+                <a:solidFill>
+                  <a:srgbClr val="1A2027"/>
+                </a:solidFill>
+                <a:latin typeface="Arial"/>
+              </a:rPr>
+              <a:t> o </a:t>
+            </a:r>
+            <a:r>
+              <a:rPr sz="1500" dirty="0" err="1">
+                <a:solidFill>
+                  <a:srgbClr val="1A2027"/>
+                </a:solidFill>
+                <a:latin typeface="Arial"/>
+              </a:rPr>
+              <a:t>desvio</a:t>
+            </a:r>
+            <a:r>
+              <a:rPr sz="1500" dirty="0">
+                <a:solidFill>
+                  <a:srgbClr val="1A2027"/>
+                </a:solidFill>
+                <a:latin typeface="Arial"/>
+              </a:rPr>
+              <a:t> de </a:t>
+            </a:r>
+            <a:r>
+              <a:rPr sz="1500" dirty="0" err="1">
+                <a:solidFill>
+                  <a:srgbClr val="1A2027"/>
+                </a:solidFill>
+                <a:latin typeface="Arial"/>
+              </a:rPr>
+              <a:t>velocidade</a:t>
+            </a:r>
+            <a:r>
+              <a:rPr sz="1500" dirty="0">
+                <a:solidFill>
+                  <a:srgbClr val="1A2027"/>
+                </a:solidFill>
+                <a:latin typeface="Arial"/>
+              </a:rPr>
+              <a:t> sob carga (</a:t>
+            </a:r>
+            <a:r>
+              <a:rPr sz="1500" dirty="0" err="1">
+                <a:solidFill>
+                  <a:srgbClr val="1A2027"/>
+                </a:solidFill>
+                <a:latin typeface="Arial"/>
+              </a:rPr>
+              <a:t>erro</a:t>
+            </a:r>
+            <a:r>
+              <a:rPr sz="1500" dirty="0">
+                <a:solidFill>
+                  <a:srgbClr val="1A2027"/>
+                </a:solidFill>
+                <a:latin typeface="Arial"/>
+              </a:rPr>
+              <a:t> de regime </a:t>
+            </a:r>
+            <a:r>
+              <a:rPr sz="1500" dirty="0" err="1">
+                <a:solidFill>
+                  <a:srgbClr val="1A2027"/>
+                </a:solidFill>
+                <a:latin typeface="Arial"/>
+              </a:rPr>
+              <a:t>próximo</a:t>
+            </a:r>
+            <a:r>
+              <a:rPr sz="1500" dirty="0">
+                <a:solidFill>
+                  <a:srgbClr val="1A2027"/>
+                </a:solidFill>
+                <a:latin typeface="Arial"/>
+              </a:rPr>
+              <a:t> de zero) </a:t>
+            </a:r>
+            <a:r>
+              <a:rPr sz="1500" dirty="0" err="1">
+                <a:solidFill>
+                  <a:srgbClr val="1A2027"/>
+                </a:solidFill>
+                <a:latin typeface="Arial"/>
+              </a:rPr>
+              <a:t>em</a:t>
+            </a:r>
+            <a:r>
+              <a:rPr sz="1500" dirty="0">
+                <a:solidFill>
+                  <a:srgbClr val="1A2027"/>
+                </a:solidFill>
+                <a:latin typeface="Arial"/>
+              </a:rPr>
+              <a:t> </a:t>
+            </a:r>
+            <a:r>
+              <a:rPr sz="1500" dirty="0" err="1">
+                <a:solidFill>
+                  <a:srgbClr val="1A2027"/>
+                </a:solidFill>
+                <a:latin typeface="Arial"/>
+              </a:rPr>
+              <a:t>todos</a:t>
+            </a:r>
+            <a:r>
+              <a:rPr sz="1500" dirty="0">
+                <a:solidFill>
+                  <a:srgbClr val="1A2027"/>
+                </a:solidFill>
+                <a:latin typeface="Arial"/>
+              </a:rPr>
+              <a:t> </a:t>
+            </a:r>
+            <a:r>
+              <a:rPr sz="1500" dirty="0" err="1">
+                <a:solidFill>
+                  <a:srgbClr val="1A2027"/>
+                </a:solidFill>
+                <a:latin typeface="Arial"/>
+              </a:rPr>
+              <a:t>os</a:t>
+            </a:r>
+            <a:r>
+              <a:rPr sz="1500" dirty="0">
+                <a:solidFill>
+                  <a:srgbClr val="1A2027"/>
+                </a:solidFill>
+                <a:latin typeface="Arial"/>
+              </a:rPr>
+              <a:t> </a:t>
+            </a:r>
+            <a:r>
+              <a:rPr sz="1500" dirty="0" err="1">
+                <a:solidFill>
+                  <a:srgbClr val="1A2027"/>
+                </a:solidFill>
+                <a:latin typeface="Arial"/>
+              </a:rPr>
+              <a:t>motores</a:t>
+            </a:r>
+            <a:r>
+              <a:rPr sz="1500" dirty="0">
+                <a:solidFill>
+                  <a:srgbClr val="1A2027"/>
+                </a:solidFill>
+                <a:latin typeface="Arial"/>
+              </a:rPr>
+              <a:t> e </a:t>
+            </a:r>
+            <a:r>
+              <a:rPr sz="1500" dirty="0" err="1">
+                <a:solidFill>
+                  <a:srgbClr val="1A2027"/>
+                </a:solidFill>
+                <a:latin typeface="Arial"/>
+              </a:rPr>
+              <a:t>condições</a:t>
+            </a:r>
+            <a:r>
+              <a:rPr sz="1500" dirty="0">
+                <a:solidFill>
+                  <a:srgbClr val="1A2027"/>
+                </a:solidFill>
+                <a:latin typeface="Arial"/>
+              </a:rPr>
+              <a:t> </a:t>
+            </a:r>
+            <a:r>
+              <a:rPr sz="1500" dirty="0" err="1">
+                <a:solidFill>
+                  <a:srgbClr val="1A2027"/>
+                </a:solidFill>
+                <a:latin typeface="Arial"/>
+              </a:rPr>
+              <a:t>testados</a:t>
+            </a:r>
+            <a:r>
+              <a:rPr sz="1500" dirty="0">
+                <a:solidFill>
+                  <a:srgbClr val="1A2027"/>
+                </a:solidFill>
+                <a:latin typeface="Arial"/>
+              </a:rPr>
+              <a:t>; o V/F </a:t>
+            </a:r>
+            <a:r>
+              <a:rPr sz="1500" dirty="0" err="1">
+                <a:solidFill>
+                  <a:srgbClr val="1A2027"/>
+                </a:solidFill>
+                <a:latin typeface="Arial"/>
+              </a:rPr>
+              <a:t>apresenta</a:t>
+            </a:r>
+            <a:r>
+              <a:rPr sz="1500" dirty="0">
+                <a:solidFill>
+                  <a:srgbClr val="1A2027"/>
+                </a:solidFill>
+                <a:latin typeface="Arial"/>
+              </a:rPr>
+              <a:t> </a:t>
+            </a:r>
+            <a:r>
+              <a:rPr sz="1500" dirty="0" err="1">
+                <a:solidFill>
+                  <a:srgbClr val="1A2027"/>
+                </a:solidFill>
+                <a:latin typeface="Arial"/>
+              </a:rPr>
+              <a:t>desvio</a:t>
+            </a:r>
+            <a:r>
+              <a:rPr sz="1500" dirty="0">
+                <a:solidFill>
+                  <a:srgbClr val="1A2027"/>
+                </a:solidFill>
+                <a:latin typeface="Arial"/>
+              </a:rPr>
+              <a:t> </a:t>
+            </a:r>
+            <a:r>
+              <a:rPr sz="1500" dirty="0" err="1">
+                <a:solidFill>
+                  <a:srgbClr val="1A2027"/>
+                </a:solidFill>
+                <a:latin typeface="Arial"/>
+              </a:rPr>
+              <a:t>permanente</a:t>
+            </a:r>
+            <a:r>
+              <a:rPr sz="1500" dirty="0">
+                <a:solidFill>
+                  <a:srgbClr val="1A2027"/>
+                </a:solidFill>
+                <a:latin typeface="Arial"/>
+              </a:rPr>
+              <a:t> </a:t>
+            </a:r>
+            <a:r>
+              <a:rPr sz="1500" dirty="0" err="1">
+                <a:solidFill>
+                  <a:srgbClr val="1A2027"/>
+                </a:solidFill>
+                <a:latin typeface="Arial"/>
+              </a:rPr>
+              <a:t>por</a:t>
+            </a:r>
+            <a:r>
+              <a:rPr sz="1500" dirty="0">
+                <a:solidFill>
+                  <a:srgbClr val="1A2027"/>
+                </a:solidFill>
+                <a:latin typeface="Arial"/>
+              </a:rPr>
+              <a:t> </a:t>
+            </a:r>
+            <a:r>
+              <a:rPr sz="1500" dirty="0" err="1">
+                <a:solidFill>
+                  <a:srgbClr val="1A2027"/>
+                </a:solidFill>
+                <a:latin typeface="Arial"/>
+              </a:rPr>
+              <a:t>escorregamento</a:t>
+            </a:r>
+            <a:r>
+              <a:rPr sz="1500" dirty="0">
+                <a:solidFill>
+                  <a:srgbClr val="1A2027"/>
+                </a:solidFill>
+                <a:latin typeface="Arial"/>
+              </a:rPr>
+              <a:t>.</a:t>
             </a:r>
           </a:p>
           <a:p>
@@ -3391,13 +4043,157 @@
               </a:spcAft>
             </a:pPr>
             <a:r>
-              <a:rPr sz="1500">
-                <a:solidFill>
-                  <a:srgbClr val="1A2027"/>
-                </a:solidFill>
-                <a:latin typeface="Arial"/>
-              </a:rPr>
-              <a:t>•  No motor pequeno e no motor grande a 30 Hz, o FOC também acomoda o conjugado bem mais rápido que o V/F.</a:t>
+              <a:rPr sz="1500" dirty="0">
+                <a:solidFill>
+                  <a:srgbClr val="1A2027"/>
+                </a:solidFill>
+                <a:latin typeface="Arial"/>
+              </a:rPr>
+              <a:t>•  No motor </a:t>
+            </a:r>
+            <a:r>
+              <a:rPr sz="1500" dirty="0" err="1">
+                <a:solidFill>
+                  <a:srgbClr val="1A2027"/>
+                </a:solidFill>
+                <a:latin typeface="Arial"/>
+              </a:rPr>
+              <a:t>pequeno</a:t>
+            </a:r>
+            <a:r>
+              <a:rPr sz="1500" dirty="0">
+                <a:solidFill>
+                  <a:srgbClr val="1A2027"/>
+                </a:solidFill>
+                <a:latin typeface="Arial"/>
+              </a:rPr>
+              <a:t> e no motor grande a 30 Hz, o FOC </a:t>
+            </a:r>
+            <a:r>
+              <a:rPr sz="1500" dirty="0" err="1">
+                <a:solidFill>
+                  <a:srgbClr val="1A2027"/>
+                </a:solidFill>
+                <a:latin typeface="Arial"/>
+              </a:rPr>
+              <a:t>também</a:t>
+            </a:r>
+            <a:r>
+              <a:rPr sz="1500" dirty="0">
+                <a:solidFill>
+                  <a:srgbClr val="1A2027"/>
+                </a:solidFill>
+                <a:latin typeface="Arial"/>
+              </a:rPr>
+              <a:t> </a:t>
+            </a:r>
+            <a:r>
+              <a:rPr sz="1500" dirty="0" err="1">
+                <a:solidFill>
+                  <a:srgbClr val="1A2027"/>
+                </a:solidFill>
+                <a:latin typeface="Arial"/>
+              </a:rPr>
+              <a:t>acomoda</a:t>
+            </a:r>
+            <a:r>
+              <a:rPr sz="1500" dirty="0">
+                <a:solidFill>
+                  <a:srgbClr val="1A2027"/>
+                </a:solidFill>
+                <a:latin typeface="Arial"/>
+              </a:rPr>
+              <a:t> o </a:t>
+            </a:r>
+            <a:r>
+              <a:rPr sz="1500" dirty="0" err="1">
+                <a:solidFill>
+                  <a:srgbClr val="1A2027"/>
+                </a:solidFill>
+                <a:latin typeface="Arial"/>
+              </a:rPr>
+              <a:t>conjugado</a:t>
+            </a:r>
+            <a:r>
+              <a:rPr sz="1500" dirty="0">
+                <a:solidFill>
+                  <a:srgbClr val="1A2027"/>
+                </a:solidFill>
+                <a:latin typeface="Arial"/>
+              </a:rPr>
+              <a:t> </a:t>
+            </a:r>
+            <a:r>
+              <a:rPr sz="1500" dirty="0" err="1">
+                <a:solidFill>
+                  <a:srgbClr val="1A2027"/>
+                </a:solidFill>
+                <a:latin typeface="Arial"/>
+              </a:rPr>
+              <a:t>bem</a:t>
+            </a:r>
+            <a:r>
+              <a:rPr sz="1500" dirty="0">
+                <a:solidFill>
+                  <a:srgbClr val="1A2027"/>
+                </a:solidFill>
+                <a:latin typeface="Arial"/>
+              </a:rPr>
+              <a:t> </a:t>
+            </a:r>
+            <a:r>
+              <a:rPr sz="1500" dirty="0" err="1">
+                <a:solidFill>
+                  <a:srgbClr val="1A2027"/>
+                </a:solidFill>
+                <a:latin typeface="Arial"/>
+              </a:rPr>
+              <a:t>mais</a:t>
+            </a:r>
+            <a:r>
+              <a:rPr sz="1500" dirty="0">
+                <a:solidFill>
+                  <a:srgbClr val="1A2027"/>
+                </a:solidFill>
+                <a:latin typeface="Arial"/>
+              </a:rPr>
+              <a:t> </a:t>
+            </a:r>
+            <a:r>
+              <a:rPr sz="1500" dirty="0" err="1">
+                <a:solidFill>
+                  <a:srgbClr val="1A2027"/>
+                </a:solidFill>
+                <a:latin typeface="Arial"/>
+              </a:rPr>
+              <a:t>rápido</a:t>
+            </a:r>
+            <a:r>
+              <a:rPr sz="1500" dirty="0">
+                <a:solidFill>
+                  <a:srgbClr val="1A2027"/>
+                </a:solidFill>
+                <a:latin typeface="Arial"/>
+              </a:rPr>
+              <a:t> </a:t>
+            </a:r>
+            <a:r>
+              <a:rPr sz="1500" dirty="0" err="1">
+                <a:solidFill>
+                  <a:srgbClr val="1A2027"/>
+                </a:solidFill>
+                <a:latin typeface="Arial"/>
+              </a:rPr>
+              <a:t>que</a:t>
+            </a:r>
+            <a:r>
+              <a:rPr sz="1500" dirty="0">
+                <a:solidFill>
+                  <a:srgbClr val="1A2027"/>
+                </a:solidFill>
+                <a:latin typeface="Arial"/>
+              </a:rPr>
+              <a:t> o V/F.</a:t>
             </a:r>
           </a:p>
           <a:p>
@@ -3407,13 +4203,373 @@
               </a:spcAft>
             </a:pPr>
             <a:r>
-              <a:rPr sz="1500">
-                <a:solidFill>
-                  <a:srgbClr val="1A2027"/>
-                </a:solidFill>
-                <a:latin typeface="Arial"/>
-              </a:rPr>
-              <a:t>•  No motor grande à velocidade nominal (60 Hz), porém, o FOC acomoda bem mais devagar que o V/F (~5,2 s contra frações de segundo) e com sobressinal elevado — a sintonia automática que funciona bem a 30 Hz não se sustenta nessa condição.</a:t>
+              <a:rPr sz="1500" dirty="0">
+                <a:solidFill>
+                  <a:srgbClr val="1A2027"/>
+                </a:solidFill>
+                <a:latin typeface="Arial"/>
+              </a:rPr>
+              <a:t>•  No motor grande à </a:t>
+            </a:r>
+            <a:r>
+              <a:rPr sz="1500" dirty="0" err="1">
+                <a:solidFill>
+                  <a:srgbClr val="1A2027"/>
+                </a:solidFill>
+                <a:latin typeface="Arial"/>
+              </a:rPr>
+              <a:t>velocidade</a:t>
+            </a:r>
+            <a:r>
+              <a:rPr sz="1500" dirty="0">
+                <a:solidFill>
+                  <a:srgbClr val="1A2027"/>
+                </a:solidFill>
+                <a:latin typeface="Arial"/>
+              </a:rPr>
+              <a:t> nominal (60 Hz), </a:t>
+            </a:r>
+            <a:r>
+              <a:rPr sz="1500" dirty="0" err="1">
+                <a:solidFill>
+                  <a:srgbClr val="1A2027"/>
+                </a:solidFill>
+                <a:latin typeface="Arial"/>
+              </a:rPr>
+              <a:t>porém</a:t>
+            </a:r>
+            <a:r>
+              <a:rPr sz="1500" dirty="0">
+                <a:solidFill>
+                  <a:srgbClr val="1A2027"/>
+                </a:solidFill>
+                <a:latin typeface="Arial"/>
+              </a:rPr>
+              <a:t>, o FOC </a:t>
+            </a:r>
+            <a:r>
+              <a:rPr sz="1500" dirty="0" err="1">
+                <a:solidFill>
+                  <a:srgbClr val="1A2027"/>
+                </a:solidFill>
+                <a:latin typeface="Arial"/>
+              </a:rPr>
+              <a:t>acomoda</a:t>
+            </a:r>
+            <a:r>
+              <a:rPr sz="1500" dirty="0">
+                <a:solidFill>
+                  <a:srgbClr val="1A2027"/>
+                </a:solidFill>
+                <a:latin typeface="Arial"/>
+              </a:rPr>
+              <a:t> </a:t>
+            </a:r>
+            <a:r>
+              <a:rPr sz="1500" dirty="0" err="1">
+                <a:solidFill>
+                  <a:srgbClr val="1A2027"/>
+                </a:solidFill>
+                <a:latin typeface="Arial"/>
+              </a:rPr>
+              <a:t>bem</a:t>
+            </a:r>
+            <a:r>
+              <a:rPr sz="1500" dirty="0">
+                <a:solidFill>
+                  <a:srgbClr val="1A2027"/>
+                </a:solidFill>
+                <a:latin typeface="Arial"/>
+              </a:rPr>
+              <a:t> </a:t>
+            </a:r>
+            <a:r>
+              <a:rPr sz="1500" dirty="0" err="1">
+                <a:solidFill>
+                  <a:srgbClr val="1A2027"/>
+                </a:solidFill>
+                <a:latin typeface="Arial"/>
+              </a:rPr>
+              <a:t>mais</a:t>
+            </a:r>
+            <a:r>
+              <a:rPr sz="1500" dirty="0">
+                <a:solidFill>
+                  <a:srgbClr val="1A2027"/>
+                </a:solidFill>
+                <a:latin typeface="Arial"/>
+              </a:rPr>
+              <a:t> </a:t>
+            </a:r>
+            <a:r>
+              <a:rPr sz="1500" dirty="0" err="1">
+                <a:solidFill>
+                  <a:srgbClr val="1A2027"/>
+                </a:solidFill>
+                <a:latin typeface="Arial"/>
+              </a:rPr>
+              <a:t>devagar</a:t>
+            </a:r>
+            <a:r>
+              <a:rPr sz="1500" dirty="0">
+                <a:solidFill>
+                  <a:srgbClr val="1A2027"/>
+                </a:solidFill>
+                <a:latin typeface="Arial"/>
+              </a:rPr>
+              <a:t> </a:t>
+            </a:r>
+            <a:r>
+              <a:rPr sz="1500" dirty="0" err="1">
+                <a:solidFill>
+                  <a:srgbClr val="1A2027"/>
+                </a:solidFill>
+                <a:latin typeface="Arial"/>
+              </a:rPr>
+              <a:t>que</a:t>
+            </a:r>
+            <a:r>
+              <a:rPr sz="1500" dirty="0">
+                <a:solidFill>
+                  <a:srgbClr val="1A2027"/>
+                </a:solidFill>
+                <a:latin typeface="Arial"/>
+              </a:rPr>
+              <a:t> o V/F (~5,2 s contra </a:t>
+            </a:r>
+            <a:r>
+              <a:rPr sz="1500" dirty="0" err="1">
+                <a:solidFill>
+                  <a:srgbClr val="1A2027"/>
+                </a:solidFill>
+                <a:latin typeface="Arial"/>
+              </a:rPr>
+              <a:t>frações</a:t>
+            </a:r>
+            <a:r>
+              <a:rPr sz="1500" dirty="0">
+                <a:solidFill>
+                  <a:srgbClr val="1A2027"/>
+                </a:solidFill>
+                <a:latin typeface="Arial"/>
+              </a:rPr>
+              <a:t> de </a:t>
+            </a:r>
+            <a:r>
+              <a:rPr sz="1500" dirty="0" err="1">
+                <a:solidFill>
+                  <a:srgbClr val="1A2027"/>
+                </a:solidFill>
+                <a:latin typeface="Arial"/>
+              </a:rPr>
+              <a:t>segundo</a:t>
+            </a:r>
+            <a:r>
+              <a:rPr sz="1500" dirty="0">
+                <a:solidFill>
+                  <a:srgbClr val="1A2027"/>
+                </a:solidFill>
+                <a:latin typeface="Arial"/>
+              </a:rPr>
+              <a:t>) e com </a:t>
+            </a:r>
+            <a:r>
+              <a:rPr sz="1500" dirty="0" err="1">
+                <a:solidFill>
+                  <a:srgbClr val="1A2027"/>
+                </a:solidFill>
+                <a:latin typeface="Arial"/>
+              </a:rPr>
+              <a:t>sobressinal</a:t>
+            </a:r>
+            <a:r>
+              <a:rPr sz="1500" dirty="0">
+                <a:solidFill>
+                  <a:srgbClr val="1A2027"/>
+                </a:solidFill>
+                <a:latin typeface="Arial"/>
+              </a:rPr>
+              <a:t> </a:t>
+            </a:r>
+            <a:r>
+              <a:rPr sz="1500" dirty="0" err="1">
+                <a:solidFill>
+                  <a:srgbClr val="1A2027"/>
+                </a:solidFill>
+                <a:latin typeface="Arial"/>
+              </a:rPr>
+              <a:t>elevado</a:t>
+            </a:r>
+            <a:r>
+              <a:rPr sz="1500" dirty="0">
+                <a:solidFill>
+                  <a:srgbClr val="1A2027"/>
+                </a:solidFill>
+                <a:latin typeface="Arial"/>
+              </a:rPr>
+              <a:t> — a </a:t>
+            </a:r>
+            <a:r>
+              <a:rPr sz="1500" dirty="0" err="1">
+                <a:solidFill>
+                  <a:srgbClr val="1A2027"/>
+                </a:solidFill>
+                <a:latin typeface="Arial"/>
+              </a:rPr>
+              <a:t>sintonia</a:t>
+            </a:r>
+            <a:r>
+              <a:rPr sz="1500" dirty="0">
+                <a:solidFill>
+                  <a:srgbClr val="1A2027"/>
+                </a:solidFill>
+                <a:latin typeface="Arial"/>
+              </a:rPr>
+              <a:t> </a:t>
+            </a:r>
+            <a:r>
+              <a:rPr sz="1500" dirty="0" err="1">
+                <a:solidFill>
+                  <a:srgbClr val="1A2027"/>
+                </a:solidFill>
+                <a:latin typeface="Arial"/>
+              </a:rPr>
+              <a:t>automática</a:t>
+            </a:r>
+            <a:r>
+              <a:rPr sz="1500" dirty="0">
+                <a:solidFill>
+                  <a:srgbClr val="1A2027"/>
+                </a:solidFill>
+                <a:latin typeface="Arial"/>
+              </a:rPr>
+              <a:t> </a:t>
+            </a:r>
+            <a:r>
+              <a:rPr sz="1500" dirty="0" err="1">
+                <a:solidFill>
+                  <a:srgbClr val="1A2027"/>
+                </a:solidFill>
+                <a:latin typeface="Arial"/>
+              </a:rPr>
+              <a:t>que</a:t>
+            </a:r>
+            <a:r>
+              <a:rPr sz="1500" dirty="0">
+                <a:solidFill>
+                  <a:srgbClr val="1A2027"/>
+                </a:solidFill>
+                <a:latin typeface="Arial"/>
+              </a:rPr>
+              <a:t> </a:t>
+            </a:r>
+            <a:r>
+              <a:rPr sz="1500" dirty="0" err="1">
+                <a:solidFill>
+                  <a:srgbClr val="1A2027"/>
+                </a:solidFill>
+                <a:latin typeface="Arial"/>
+              </a:rPr>
+              <a:t>funciona</a:t>
+            </a:r>
+            <a:r>
+              <a:rPr sz="1500" dirty="0">
+                <a:solidFill>
+                  <a:srgbClr val="1A2027"/>
+                </a:solidFill>
+                <a:latin typeface="Arial"/>
+              </a:rPr>
+              <a:t> </a:t>
+            </a:r>
+            <a:r>
+              <a:rPr sz="1500" dirty="0" err="1">
+                <a:solidFill>
+                  <a:srgbClr val="1A2027"/>
+                </a:solidFill>
+                <a:latin typeface="Arial"/>
+              </a:rPr>
+              <a:t>bem</a:t>
+            </a:r>
+            <a:r>
+              <a:rPr sz="1500" dirty="0">
+                <a:solidFill>
+                  <a:srgbClr val="1A2027"/>
+                </a:solidFill>
+                <a:latin typeface="Arial"/>
+              </a:rPr>
+              <a:t> a 30 Hz </a:t>
+            </a:r>
+            <a:r>
+              <a:rPr sz="1500" dirty="0" err="1">
+                <a:solidFill>
+                  <a:srgbClr val="1A2027"/>
+                </a:solidFill>
+                <a:latin typeface="Arial"/>
+              </a:rPr>
+              <a:t>não</a:t>
+            </a:r>
+            <a:r>
+              <a:rPr sz="1500" dirty="0">
+                <a:solidFill>
+                  <a:srgbClr val="1A2027"/>
+                </a:solidFill>
+                <a:latin typeface="Arial"/>
+              </a:rPr>
+              <a:t> se </a:t>
+            </a:r>
+            <a:r>
+              <a:rPr sz="1500" dirty="0" err="1">
+                <a:solidFill>
+                  <a:srgbClr val="1A2027"/>
+                </a:solidFill>
+                <a:latin typeface="Arial"/>
+              </a:rPr>
+              <a:t>sustenta</a:t>
+            </a:r>
+            <a:r>
+              <a:rPr sz="1500" dirty="0">
+                <a:solidFill>
+                  <a:srgbClr val="1A2027"/>
+                </a:solidFill>
+                <a:latin typeface="Arial"/>
+              </a:rPr>
+              <a:t> </a:t>
+            </a:r>
+            <a:r>
+              <a:rPr sz="1500" dirty="0" err="1">
+                <a:solidFill>
+                  <a:srgbClr val="1A2027"/>
+                </a:solidFill>
+                <a:latin typeface="Arial"/>
+              </a:rPr>
+              <a:t>nessa</a:t>
+            </a:r>
+            <a:r>
+              <a:rPr sz="1500" dirty="0">
+                <a:solidFill>
+                  <a:srgbClr val="1A2027"/>
+                </a:solidFill>
+                <a:latin typeface="Arial"/>
+              </a:rPr>
+              <a:t> </a:t>
+            </a:r>
+            <a:r>
+              <a:rPr sz="1500" dirty="0" err="1">
+                <a:solidFill>
+                  <a:srgbClr val="1A2027"/>
+                </a:solidFill>
+                <a:latin typeface="Arial"/>
+              </a:rPr>
+              <a:t>condição</a:t>
+            </a:r>
+            <a:r>
+              <a:rPr sz="1500" dirty="0">
+                <a:solidFill>
+                  <a:srgbClr val="1A2027"/>
+                </a:solidFill>
+                <a:latin typeface="Arial"/>
+              </a:rPr>
+              <a:t>.</a:t>
             </a:r>
           </a:p>
           <a:p>
@@ -3423,13 +4579,283 @@
               </a:spcAft>
             </a:pPr>
             <a:r>
-              <a:rPr sz="1500">
-                <a:solidFill>
-                  <a:srgbClr val="1A2027"/>
-                </a:solidFill>
-                <a:latin typeface="Arial"/>
-              </a:rPr>
-              <a:t>•  O desvio do V/F cresce proporcionalmente quando a referência de frequência cai (visto a 30 Hz, 50% da velocidade nominal) — comportamento esperado dos acionamentos escalares em malha aberta.</a:t>
+              <a:rPr sz="1500" dirty="0">
+                <a:solidFill>
+                  <a:srgbClr val="1A2027"/>
+                </a:solidFill>
+                <a:latin typeface="Arial"/>
+              </a:rPr>
+              <a:t>•  O </a:t>
+            </a:r>
+            <a:r>
+              <a:rPr sz="1500" dirty="0" err="1">
+                <a:solidFill>
+                  <a:srgbClr val="1A2027"/>
+                </a:solidFill>
+                <a:latin typeface="Arial"/>
+              </a:rPr>
+              <a:t>desvio</a:t>
+            </a:r>
+            <a:r>
+              <a:rPr sz="1500" dirty="0">
+                <a:solidFill>
+                  <a:srgbClr val="1A2027"/>
+                </a:solidFill>
+                <a:latin typeface="Arial"/>
+              </a:rPr>
+              <a:t> do V/F </a:t>
+            </a:r>
+            <a:r>
+              <a:rPr sz="1500" dirty="0" err="1">
+                <a:solidFill>
+                  <a:srgbClr val="1A2027"/>
+                </a:solidFill>
+                <a:latin typeface="Arial"/>
+              </a:rPr>
+              <a:t>cresce</a:t>
+            </a:r>
+            <a:r>
+              <a:rPr sz="1500" dirty="0">
+                <a:solidFill>
+                  <a:srgbClr val="1A2027"/>
+                </a:solidFill>
+                <a:latin typeface="Arial"/>
+              </a:rPr>
+              <a:t> </a:t>
+            </a:r>
+            <a:r>
+              <a:rPr sz="1500" dirty="0" err="1">
+                <a:solidFill>
+                  <a:srgbClr val="1A2027"/>
+                </a:solidFill>
+                <a:latin typeface="Arial"/>
+              </a:rPr>
+              <a:t>proporcionalmente</a:t>
+            </a:r>
+            <a:r>
+              <a:rPr sz="1500" dirty="0">
+                <a:solidFill>
+                  <a:srgbClr val="1A2027"/>
+                </a:solidFill>
+                <a:latin typeface="Arial"/>
+              </a:rPr>
+              <a:t> </a:t>
+            </a:r>
+            <a:r>
+              <a:rPr sz="1500" dirty="0" err="1">
+                <a:solidFill>
+                  <a:srgbClr val="1A2027"/>
+                </a:solidFill>
+                <a:latin typeface="Arial"/>
+              </a:rPr>
+              <a:t>quando</a:t>
+            </a:r>
+            <a:r>
+              <a:rPr sz="1500" dirty="0">
+                <a:solidFill>
+                  <a:srgbClr val="1A2027"/>
+                </a:solidFill>
+                <a:latin typeface="Arial"/>
+              </a:rPr>
+              <a:t> a </a:t>
+            </a:r>
+            <a:r>
+              <a:rPr sz="1500" dirty="0" err="1">
+                <a:solidFill>
+                  <a:srgbClr val="1A2027"/>
+                </a:solidFill>
+                <a:latin typeface="Arial"/>
+              </a:rPr>
+              <a:t>referência</a:t>
+            </a:r>
+            <a:r>
+              <a:rPr sz="1500" dirty="0">
+                <a:solidFill>
+                  <a:srgbClr val="1A2027"/>
+                </a:solidFill>
+                <a:latin typeface="Arial"/>
+              </a:rPr>
+              <a:t> de </a:t>
+            </a:r>
+            <a:r>
+              <a:rPr sz="1500" dirty="0" err="1">
+                <a:solidFill>
+                  <a:srgbClr val="1A2027"/>
+                </a:solidFill>
+                <a:latin typeface="Arial"/>
+              </a:rPr>
+              <a:t>frequência</a:t>
+            </a:r>
+            <a:r>
+              <a:rPr sz="1500" dirty="0">
+                <a:solidFill>
+                  <a:srgbClr val="1A2027"/>
+                </a:solidFill>
+                <a:latin typeface="Arial"/>
+              </a:rPr>
+              <a:t> </a:t>
+            </a:r>
+            <a:r>
+              <a:rPr sz="1500" dirty="0" err="1">
+                <a:solidFill>
+                  <a:srgbClr val="1A2027"/>
+                </a:solidFill>
+                <a:latin typeface="Arial"/>
+              </a:rPr>
+              <a:t>cai</a:t>
+            </a:r>
+            <a:r>
+              <a:rPr sz="1500" dirty="0">
+                <a:solidFill>
+                  <a:srgbClr val="1A2027"/>
+                </a:solidFill>
+                <a:latin typeface="Arial"/>
+              </a:rPr>
+              <a:t> (visto a 30 Hz, 50% da </a:t>
+            </a:r>
+            <a:r>
+              <a:rPr sz="1500" dirty="0" err="1">
+                <a:solidFill>
+                  <a:srgbClr val="1A2027"/>
+                </a:solidFill>
+                <a:latin typeface="Arial"/>
+              </a:rPr>
+              <a:t>velocidade</a:t>
+            </a:r>
+            <a:r>
+              <a:rPr sz="1500" dirty="0">
+                <a:solidFill>
+                  <a:srgbClr val="1A2027"/>
+                </a:solidFill>
+                <a:latin typeface="Arial"/>
+              </a:rPr>
+              <a:t> nominal) — </a:t>
+            </a:r>
+            <a:r>
+              <a:rPr sz="1500" dirty="0" err="1">
+                <a:solidFill>
+                  <a:srgbClr val="1A2027"/>
+                </a:solidFill>
+                <a:latin typeface="Arial"/>
+              </a:rPr>
+              <a:t>comportamento</a:t>
+            </a:r>
+            <a:r>
+              <a:rPr sz="1500" dirty="0">
+                <a:solidFill>
+                  <a:srgbClr val="1A2027"/>
+                </a:solidFill>
+                <a:latin typeface="Arial"/>
+              </a:rPr>
+              <a:t> </a:t>
+            </a:r>
+            <a:r>
+              <a:rPr sz="1500" dirty="0" err="1">
+                <a:solidFill>
+                  <a:srgbClr val="1A2027"/>
+                </a:solidFill>
+                <a:latin typeface="Arial"/>
+              </a:rPr>
+              <a:t>esperado</a:t>
+            </a:r>
+            <a:r>
+              <a:rPr sz="1500" dirty="0">
+                <a:solidFill>
+                  <a:srgbClr val="1A2027"/>
+                </a:solidFill>
+                <a:latin typeface="Arial"/>
+              </a:rPr>
+              <a:t> dos </a:t>
+            </a:r>
+            <a:r>
+              <a:rPr sz="1500" dirty="0" err="1">
+                <a:solidFill>
+                  <a:srgbClr val="1A2027"/>
+                </a:solidFill>
+                <a:latin typeface="Arial"/>
+              </a:rPr>
+              <a:t>acionamentos</a:t>
+            </a:r>
+            <a:r>
+              <a:rPr sz="1500" dirty="0">
+                <a:solidFill>
+                  <a:srgbClr val="1A2027"/>
+                </a:solidFill>
+                <a:latin typeface="Arial"/>
+              </a:rPr>
+              <a:t> </a:t>
+            </a:r>
+            <a:r>
+              <a:rPr sz="1500" dirty="0" err="1">
+                <a:solidFill>
+                  <a:srgbClr val="1A2027"/>
+                </a:solidFill>
+                <a:latin typeface="Arial"/>
+              </a:rPr>
+              <a:t>escalares</a:t>
+            </a:r>
+            <a:r>
+              <a:rPr sz="1500" dirty="0">
+                <a:solidFill>
+                  <a:srgbClr val="1A2027"/>
+                </a:solidFill>
+                <a:latin typeface="Arial"/>
+              </a:rPr>
+              <a:t> </a:t>
+            </a:r>
+            <a:r>
+              <a:rPr sz="1500" dirty="0" err="1">
+                <a:solidFill>
+                  <a:srgbClr val="1A2027"/>
+                </a:solidFill>
+                <a:latin typeface="Arial"/>
+              </a:rPr>
+              <a:t>em</a:t>
+            </a:r>
+            <a:r>
+              <a:rPr sz="1500" dirty="0">
+                <a:solidFill>
+                  <a:srgbClr val="1A2027"/>
+                </a:solidFill>
+                <a:latin typeface="Arial"/>
+              </a:rPr>
+              <a:t> </a:t>
+            </a:r>
+            <a:r>
+              <a:rPr sz="1500" dirty="0" err="1">
+                <a:solidFill>
+                  <a:srgbClr val="1A2027"/>
+                </a:solidFill>
+                <a:latin typeface="Arial"/>
+              </a:rPr>
+              <a:t>malha</a:t>
+            </a:r>
+            <a:r>
+              <a:rPr sz="1500" dirty="0">
+                <a:solidFill>
+                  <a:srgbClr val="1A2027"/>
+                </a:solidFill>
+                <a:latin typeface="Arial"/>
+              </a:rPr>
+              <a:t> </a:t>
+            </a:r>
+            <a:r>
+              <a:rPr sz="1500" dirty="0" err="1">
+                <a:solidFill>
+                  <a:srgbClr val="1A2027"/>
+                </a:solidFill>
+                <a:latin typeface="Arial"/>
+              </a:rPr>
+              <a:t>aberta</a:t>
+            </a:r>
+            <a:r>
+              <a:rPr sz="1500" dirty="0">
+                <a:solidFill>
+                  <a:srgbClr val="1A2027"/>
+                </a:solidFill>
+                <a:latin typeface="Arial"/>
+              </a:rPr>
+              <a:t>.</a:t>
             </a:r>
           </a:p>
           <a:p>
@@ -3439,13 +4865,301 @@
               </a:spcAft>
             </a:pPr>
             <a:r>
-              <a:rPr sz="1500">
-                <a:solidFill>
-                  <a:srgbClr val="1A2027"/>
-                </a:solidFill>
-                <a:latin typeface="Arial"/>
-              </a:rPr>
-              <a:t>•  Nenhum ganho de controlador foi copiado entre motores ou cenários: cada acionamento usa sua própria sintonia calculada automaticamente.</a:t>
+              <a:rPr sz="1500" dirty="0">
+                <a:solidFill>
+                  <a:srgbClr val="1A2027"/>
+                </a:solidFill>
+                <a:latin typeface="Arial"/>
+              </a:rPr>
+              <a:t>•  </a:t>
+            </a:r>
+            <a:r>
+              <a:rPr sz="1500" dirty="0" err="1">
+                <a:solidFill>
+                  <a:srgbClr val="1A2027"/>
+                </a:solidFill>
+                <a:latin typeface="Arial"/>
+              </a:rPr>
+              <a:t>Nenhum</a:t>
+            </a:r>
+            <a:r>
+              <a:rPr sz="1500" dirty="0">
+                <a:solidFill>
+                  <a:srgbClr val="1A2027"/>
+                </a:solidFill>
+                <a:latin typeface="Arial"/>
+              </a:rPr>
+              <a:t> </a:t>
+            </a:r>
+            <a:r>
+              <a:rPr sz="1500" dirty="0" err="1">
+                <a:solidFill>
+                  <a:srgbClr val="1A2027"/>
+                </a:solidFill>
+                <a:latin typeface="Arial"/>
+              </a:rPr>
+              <a:t>ganho</a:t>
+            </a:r>
+            <a:r>
+              <a:rPr sz="1500" dirty="0">
+                <a:solidFill>
+                  <a:srgbClr val="1A2027"/>
+                </a:solidFill>
+                <a:latin typeface="Arial"/>
+              </a:rPr>
+              <a:t> de </a:t>
+            </a:r>
+            <a:r>
+              <a:rPr sz="1500" dirty="0" err="1">
+                <a:solidFill>
+                  <a:srgbClr val="1A2027"/>
+                </a:solidFill>
+                <a:latin typeface="Arial"/>
+              </a:rPr>
+              <a:t>controlador</a:t>
+            </a:r>
+            <a:r>
+              <a:rPr sz="1500" dirty="0">
+                <a:solidFill>
+                  <a:srgbClr val="1A2027"/>
+                </a:solidFill>
+                <a:latin typeface="Arial"/>
+              </a:rPr>
+              <a:t> </a:t>
+            </a:r>
+            <a:r>
+              <a:rPr sz="1500" dirty="0" err="1">
+                <a:solidFill>
+                  <a:srgbClr val="1A2027"/>
+                </a:solidFill>
+                <a:latin typeface="Arial"/>
+              </a:rPr>
+              <a:t>foi</a:t>
+            </a:r>
+            <a:r>
+              <a:rPr sz="1500" dirty="0">
+                <a:solidFill>
+                  <a:srgbClr val="1A2027"/>
+                </a:solidFill>
+                <a:latin typeface="Arial"/>
+              </a:rPr>
+              <a:t> </a:t>
+            </a:r>
+            <a:r>
+              <a:rPr sz="1500" dirty="0" err="1">
+                <a:solidFill>
+                  <a:srgbClr val="1A2027"/>
+                </a:solidFill>
+                <a:latin typeface="Arial"/>
+              </a:rPr>
+              <a:t>copiado</a:t>
+            </a:r>
+            <a:r>
+              <a:rPr sz="1500" dirty="0">
+                <a:solidFill>
+                  <a:srgbClr val="1A2027"/>
+                </a:solidFill>
+                <a:latin typeface="Arial"/>
+              </a:rPr>
+              <a:t> entre </a:t>
+            </a:r>
+            <a:r>
+              <a:rPr sz="1500" dirty="0" err="1">
+                <a:solidFill>
+                  <a:srgbClr val="1A2027"/>
+                </a:solidFill>
+                <a:latin typeface="Arial"/>
+              </a:rPr>
+              <a:t>motores</a:t>
+            </a:r>
+            <a:r>
+              <a:rPr sz="1500" dirty="0">
+                <a:solidFill>
+                  <a:srgbClr val="1A2027"/>
+                </a:solidFill>
+                <a:latin typeface="Arial"/>
+              </a:rPr>
+              <a:t> </a:t>
+            </a:r>
+            <a:r>
+              <a:rPr sz="1500" dirty="0" err="1">
+                <a:solidFill>
+                  <a:srgbClr val="1A2027"/>
+                </a:solidFill>
+                <a:latin typeface="Arial"/>
+              </a:rPr>
+              <a:t>ou</a:t>
+            </a:r>
+            <a:r>
+              <a:rPr sz="1500" dirty="0">
+                <a:solidFill>
+                  <a:srgbClr val="1A2027"/>
+                </a:solidFill>
+                <a:latin typeface="Arial"/>
+              </a:rPr>
+              <a:t> </a:t>
+            </a:r>
+            <a:r>
+              <a:rPr sz="1500" dirty="0" err="1">
+                <a:solidFill>
+                  <a:srgbClr val="1A2027"/>
+                </a:solidFill>
+                <a:latin typeface="Arial"/>
+              </a:rPr>
+              <a:t>cenários</a:t>
+            </a:r>
+            <a:r>
+              <a:rPr sz="1500" dirty="0">
+                <a:solidFill>
+                  <a:srgbClr val="1A2027"/>
+                </a:solidFill>
+                <a:latin typeface="Arial"/>
+              </a:rPr>
+              <a:t>: </a:t>
+            </a:r>
+            <a:r>
+              <a:rPr sz="1500" dirty="0" err="1">
+                <a:solidFill>
+                  <a:srgbClr val="1A2027"/>
+                </a:solidFill>
+                <a:latin typeface="Arial"/>
+              </a:rPr>
+              <a:t>cada</a:t>
+            </a:r>
+            <a:r>
+              <a:rPr sz="1500" dirty="0">
+                <a:solidFill>
+                  <a:srgbClr val="1A2027"/>
+                </a:solidFill>
+                <a:latin typeface="Arial"/>
+              </a:rPr>
+              <a:t> </a:t>
+            </a:r>
+            <a:r>
+              <a:rPr sz="1500" dirty="0" err="1">
+                <a:solidFill>
+                  <a:srgbClr val="1A2027"/>
+                </a:solidFill>
+                <a:latin typeface="Arial"/>
+              </a:rPr>
+              <a:t>acionamento</a:t>
+            </a:r>
+            <a:r>
+              <a:rPr sz="1500" dirty="0">
+                <a:solidFill>
+                  <a:srgbClr val="1A2027"/>
+                </a:solidFill>
+                <a:latin typeface="Arial"/>
+              </a:rPr>
+              <a:t> </a:t>
+            </a:r>
+            <a:r>
+              <a:rPr sz="1500" dirty="0" err="1">
+                <a:solidFill>
+                  <a:srgbClr val="1A2027"/>
+                </a:solidFill>
+                <a:latin typeface="Arial"/>
+              </a:rPr>
+              <a:t>usa</a:t>
+            </a:r>
+            <a:r>
+              <a:rPr sz="1500" dirty="0">
+                <a:solidFill>
+                  <a:srgbClr val="1A2027"/>
+                </a:solidFill>
+                <a:latin typeface="Arial"/>
+              </a:rPr>
+              <a:t> </a:t>
+            </a:r>
+            <a:r>
+              <a:rPr sz="1500" dirty="0" err="1">
+                <a:solidFill>
+                  <a:srgbClr val="1A2027"/>
+                </a:solidFill>
+                <a:latin typeface="Arial"/>
+              </a:rPr>
+              <a:t>sua</a:t>
+            </a:r>
+            <a:r>
+              <a:rPr sz="1500" dirty="0">
+                <a:solidFill>
+                  <a:srgbClr val="1A2027"/>
+                </a:solidFill>
+                <a:latin typeface="Arial"/>
+              </a:rPr>
+              <a:t> </a:t>
+            </a:r>
+            <a:r>
+              <a:rPr sz="1500" dirty="0" err="1">
+                <a:solidFill>
+                  <a:srgbClr val="1A2027"/>
+                </a:solidFill>
+                <a:latin typeface="Arial"/>
+              </a:rPr>
+              <a:t>própria</a:t>
+            </a:r>
+            <a:r>
+              <a:rPr sz="1500" dirty="0">
+                <a:solidFill>
+                  <a:srgbClr val="1A2027"/>
+                </a:solidFill>
+                <a:latin typeface="Arial"/>
+              </a:rPr>
+              <a:t> </a:t>
+            </a:r>
+            <a:r>
+              <a:rPr sz="1500" dirty="0" err="1">
+                <a:solidFill>
+                  <a:srgbClr val="1A2027"/>
+                </a:solidFill>
+                <a:latin typeface="Arial"/>
+              </a:rPr>
+              <a:t>sintonia</a:t>
+            </a:r>
+            <a:r>
+              <a:rPr sz="1500" dirty="0">
+                <a:solidFill>
+                  <a:srgbClr val="1A2027"/>
+                </a:solidFill>
+                <a:latin typeface="Arial"/>
+              </a:rPr>
+              <a:t> </a:t>
+            </a:r>
+            <a:r>
+              <a:rPr sz="1500" dirty="0" err="1">
+                <a:solidFill>
+                  <a:srgbClr val="1A2027"/>
+                </a:solidFill>
+                <a:latin typeface="Arial"/>
+              </a:rPr>
+              <a:t>calculada</a:t>
+            </a:r>
+            <a:r>
+              <a:rPr sz="1500" dirty="0">
+                <a:solidFill>
+                  <a:srgbClr val="1A2027"/>
+                </a:solidFill>
+                <a:latin typeface="Arial"/>
+              </a:rPr>
+              <a:t> </a:t>
+            </a:r>
+            <a:r>
+              <a:rPr sz="1500" dirty="0" err="1">
+                <a:solidFill>
+                  <a:srgbClr val="1A2027"/>
+                </a:solidFill>
+                <a:latin typeface="Arial"/>
+              </a:rPr>
+              <a:t>automaticamente</a:t>
+            </a:r>
+            <a:r>
+              <a:rPr sz="1500" dirty="0">
+                <a:solidFill>
+                  <a:srgbClr val="1A2027"/>
+                </a:solidFill>
+                <a:latin typeface="Arial"/>
+              </a:rPr>
+              <a:t>.</a:t>
             </a:r>
           </a:p>
           <a:p>
@@ -3455,14 +5169,137 @@
               </a:spcAft>
             </a:pPr>
             <a:r>
-              <a:rPr sz="1500">
-                <a:solidFill>
-                  <a:srgbClr val="1A2027"/>
-                </a:solidFill>
-                <a:latin typeface="Arial"/>
-              </a:rPr>
-              <a:t>•  Próximos passos: revisar manualmente a sintonia do FOC no motor grande à velocidade nominal, e repetir a análise com um par de motores de porte semelhante para subsidiar uma decisão real de substituição de equipamento.</a:t>
-            </a:r>
+              <a:rPr sz="1500" dirty="0">
+                <a:solidFill>
+                  <a:srgbClr val="1A2027"/>
+                </a:solidFill>
+                <a:latin typeface="Arial"/>
+              </a:rPr>
+              <a:t>•  </a:t>
+            </a:r>
+            <a:r>
+              <a:rPr sz="1500" dirty="0" err="1">
+                <a:solidFill>
+                  <a:srgbClr val="1A2027"/>
+                </a:solidFill>
+                <a:latin typeface="Arial"/>
+              </a:rPr>
+              <a:t>Próximos</a:t>
+            </a:r>
+            <a:r>
+              <a:rPr sz="1500" dirty="0">
+                <a:solidFill>
+                  <a:srgbClr val="1A2027"/>
+                </a:solidFill>
+                <a:latin typeface="Arial"/>
+              </a:rPr>
+              <a:t> </a:t>
+            </a:r>
+            <a:r>
+              <a:rPr sz="1500" dirty="0" err="1">
+                <a:solidFill>
+                  <a:srgbClr val="1A2027"/>
+                </a:solidFill>
+                <a:latin typeface="Arial"/>
+              </a:rPr>
+              <a:t>passos</a:t>
+            </a:r>
+            <a:r>
+              <a:rPr sz="1500" dirty="0">
+                <a:solidFill>
+                  <a:srgbClr val="1A2027"/>
+                </a:solidFill>
+                <a:latin typeface="Arial"/>
+              </a:rPr>
+              <a:t>: </a:t>
+            </a:r>
+            <a:r>
+              <a:rPr sz="1500" dirty="0" err="1">
+                <a:solidFill>
+                  <a:srgbClr val="1A2027"/>
+                </a:solidFill>
+                <a:latin typeface="Arial"/>
+              </a:rPr>
+              <a:t>revisar</a:t>
+            </a:r>
+            <a:r>
+              <a:rPr sz="1500" dirty="0">
+                <a:solidFill>
+                  <a:srgbClr val="1A2027"/>
+                </a:solidFill>
+                <a:latin typeface="Arial"/>
+              </a:rPr>
+              <a:t> </a:t>
+            </a:r>
+            <a:r>
+              <a:rPr sz="1500" dirty="0" err="1">
+                <a:solidFill>
+                  <a:srgbClr val="1A2027"/>
+                </a:solidFill>
+                <a:latin typeface="Arial"/>
+              </a:rPr>
+              <a:t>manualmente</a:t>
+            </a:r>
+            <a:r>
+              <a:rPr sz="1500" dirty="0">
+                <a:solidFill>
+                  <a:srgbClr val="1A2027"/>
+                </a:solidFill>
+                <a:latin typeface="Arial"/>
+              </a:rPr>
+              <a:t> a </a:t>
+            </a:r>
+            <a:r>
+              <a:rPr sz="1500" dirty="0" err="1">
+                <a:solidFill>
+                  <a:srgbClr val="1A2027"/>
+                </a:solidFill>
+                <a:latin typeface="Arial"/>
+              </a:rPr>
+              <a:t>sintonia</a:t>
+            </a:r>
+            <a:r>
+              <a:rPr sz="1500" dirty="0">
+                <a:solidFill>
+                  <a:srgbClr val="1A2027"/>
+                </a:solidFill>
+                <a:latin typeface="Arial"/>
+              </a:rPr>
+              <a:t> do FOC no motor grande à </a:t>
+            </a:r>
+            <a:r>
+              <a:rPr sz="1500" dirty="0" err="1">
+                <a:solidFill>
+                  <a:srgbClr val="1A2027"/>
+                </a:solidFill>
+                <a:latin typeface="Arial"/>
+              </a:rPr>
+              <a:t>velocidade</a:t>
+            </a:r>
+            <a:r>
+              <a:rPr sz="1500" dirty="0">
+                <a:solidFill>
+                  <a:srgbClr val="1A2027"/>
+                </a:solidFill>
+                <a:latin typeface="Arial"/>
+              </a:rPr>
+              <a:t> nominal</a:t>
+            </a:r>
+            <a:r>
+              <a:rPr lang="pt-BR" sz="1500" dirty="0">
+                <a:solidFill>
+                  <a:srgbClr val="1A2027"/>
+                </a:solidFill>
+                <a:latin typeface="Arial"/>
+              </a:rPr>
+              <a:t>.</a:t>
+            </a:r>
+            <a:endParaRPr sz="1500" dirty="0">
+              <a:solidFill>
+                <a:srgbClr val="1A2027"/>
+              </a:solidFill>
+              <a:latin typeface="Arial"/>
+            </a:endParaRPr>
           </a:p>
         </p:txBody>
       </p:sp>
@@ -3475,7 +5312,7 @@
 </file>
 
 <file path=ppt/slides/slide2.xml><?xml version="1.0" encoding="utf-8"?>
-<p:sld xmlns:a="http://schemas.openxmlformats.org/drawingml/2006/main" xmlns:p="http://schemas.openxmlformats.org/presentationml/2006/main" xmlns:r="http://schemas.openxmlformats.org/officeDocument/2006/relationships">
+<p:sld xmlns:a="http://schemas.openxmlformats.org/drawingml/2006/main" xmlns:r="http://schemas.openxmlformats.org/officeDocument/2006/relationships" xmlns:p="http://schemas.openxmlformats.org/presentationml/2006/main">
   <p:cSld>
     <p:spTree>
       <p:nvGrpSpPr>
@@ -3483,7 +5320,14 @@
         <p:cNvGrpSpPr/>
         <p:nvPr/>
       </p:nvGrpSpPr>
-      <p:grpSpPr/>
+      <p:grpSpPr>
+        <a:xfrm>
+          <a:off x="0" y="0"/>
+          <a:ext cx="0" cy="0"/>
+          <a:chOff x="0" y="0"/>
+          <a:chExt cx="0" cy="0"/>
+        </a:xfrm>
+      </p:grpSpPr>
       <p:sp>
         <p:nvSpPr>
           <p:cNvPr id="2" name="Rectangle 1"/>
@@ -3525,6 +5369,7 @@
           <a:lstStyle/>
           <a:p>
             <a:pPr algn="ctr"/>
+            <a:endParaRPr/>
           </a:p>
         </p:txBody>
       </p:sp>
@@ -3537,7 +5382,7 @@
         <p:spPr>
           <a:xfrm>
             <a:off x="360000" y="251999"/>
-            <a:ext cx="9360000" cy="540000"/>
+            <a:ext cx="9360000" cy="400110"/>
           </a:xfrm>
           <a:prstGeom prst="rect">
             <a:avLst/>
@@ -3551,22 +5396,58 @@
           <a:lstStyle/>
           <a:p>
             <a:r>
-              <a:rPr sz="1400">
+              <a:rPr sz="2000" b="1" dirty="0">
+                <a:solidFill>
+                  <a:srgbClr val="0E5C68"/>
+                </a:solidFill>
+                <a:latin typeface="Arial"/>
+              </a:rPr>
+              <a:t>02 </a:t>
+            </a:r>
+            <a:r>
+              <a:rPr sz="1100" dirty="0">
                 <a:solidFill>
                   <a:srgbClr val="8A929B"/>
                 </a:solidFill>
                 <a:latin typeface="Consolas"/>
               </a:rPr>
-              <a:t>02  </a:t>
-            </a:r>
-            <a:r>
-              <a:rPr sz="2600" b="1">
+              <a:t> </a:t>
+            </a:r>
+            <a:r>
+              <a:rPr sz="2000" b="1" dirty="0" err="1">
                 <a:solidFill>
                   <a:srgbClr val="0E5C68"/>
                 </a:solidFill>
                 <a:latin typeface="Arial"/>
               </a:rPr>
-              <a:t>Ensaio 1 — Motor de Pequeno Porte — Degrau de Carga (60 Hz)</a:t>
+              <a:t>Ensaio</a:t>
+            </a:r>
+            <a:r>
+              <a:rPr sz="2000" b="1" dirty="0">
+                <a:solidFill>
+                  <a:srgbClr val="0E5C68"/>
+                </a:solidFill>
+                <a:latin typeface="Arial"/>
+              </a:rPr>
+              <a:t> 1 — Motor de Pequeno Porte — </a:t>
+            </a:r>
+            <a:r>
+              <a:rPr sz="2000" b="1" dirty="0" err="1">
+                <a:solidFill>
+                  <a:srgbClr val="0E5C68"/>
+                </a:solidFill>
+                <a:latin typeface="Arial"/>
+              </a:rPr>
+              <a:t>Degrau</a:t>
+            </a:r>
+            <a:r>
+              <a:rPr sz="2000" b="1" dirty="0">
+                <a:solidFill>
+                  <a:srgbClr val="0E5C68"/>
+                </a:solidFill>
+                <a:latin typeface="Arial"/>
+              </a:rPr>
+              <a:t> de Carga (60 Hz)</a:t>
             </a:r>
           </a:p>
         </p:txBody>
@@ -3638,11 +5519,41 @@
                 <a:tableStyleId>{5C22544A-7EE6-4342-B048-85BDC9FD1C3A}</a:tableStyleId>
               </a:tblPr>
               <a:tblGrid>
-                <a:gridCol w="1915200"/>
-                <a:gridCol w="1915200"/>
-                <a:gridCol w="1915200"/>
-                <a:gridCol w="1915200"/>
-                <a:gridCol w="1915200"/>
+                <a:gridCol w="1915200">
+                  <a:extLst>
+                    <a:ext uri="{9D8B030D-6E8A-4147-A177-3AD203B41FA5}">
+                      <a16:colId xmlns:a16="http://schemas.microsoft.com/office/drawing/2014/main" val="20000"/>
+                    </a:ext>
+                  </a:extLst>
+                </a:gridCol>
+                <a:gridCol w="1915200">
+                  <a:extLst>
+                    <a:ext uri="{9D8B030D-6E8A-4147-A177-3AD203B41FA5}">
+                      <a16:colId xmlns:a16="http://schemas.microsoft.com/office/drawing/2014/main" val="20001"/>
+                    </a:ext>
+                  </a:extLst>
+                </a:gridCol>
+                <a:gridCol w="1915200">
+                  <a:extLst>
+                    <a:ext uri="{9D8B030D-6E8A-4147-A177-3AD203B41FA5}">
+                      <a16:colId xmlns:a16="http://schemas.microsoft.com/office/drawing/2014/main" val="20002"/>
+                    </a:ext>
+                  </a:extLst>
+                </a:gridCol>
+                <a:gridCol w="1915200">
+                  <a:extLst>
+                    <a:ext uri="{9D8B030D-6E8A-4147-A177-3AD203B41FA5}">
+                      <a16:colId xmlns:a16="http://schemas.microsoft.com/office/drawing/2014/main" val="20003"/>
+                    </a:ext>
+                  </a:extLst>
+                </a:gridCol>
+                <a:gridCol w="1915200">
+                  <a:extLst>
+                    <a:ext uri="{9D8B030D-6E8A-4147-A177-3AD203B41FA5}">
+                      <a16:colId xmlns:a16="http://schemas.microsoft.com/office/drawing/2014/main" val="20004"/>
+                    </a:ext>
+                  </a:extLst>
+                </a:gridCol>
               </a:tblGrid>
               <a:tr h="246857">
                 <a:tc>
@@ -3740,6 +5651,11 @@
                     </a:solidFill>
                   </a:tcPr>
                 </a:tc>
+                <a:extLst>
+                  <a:ext uri="{0D108BD9-81ED-4DB2-BD59-A6C34878D82A}">
+                    <a16:rowId xmlns:a16="http://schemas.microsoft.com/office/drawing/2014/main" val="10000"/>
+                  </a:ext>
+                </a:extLst>
               </a:tr>
               <a:tr h="246857">
                 <a:tc>
@@ -3837,6 +5753,11 @@
                     </a:solidFill>
                   </a:tcPr>
                 </a:tc>
+                <a:extLst>
+                  <a:ext uri="{0D108BD9-81ED-4DB2-BD59-A6C34878D82A}">
+                    <a16:rowId xmlns:a16="http://schemas.microsoft.com/office/drawing/2014/main" val="10001"/>
+                  </a:ext>
+                </a:extLst>
               </a:tr>
               <a:tr h="246857">
                 <a:tc>
@@ -3934,6 +5855,11 @@
                     </a:solidFill>
                   </a:tcPr>
                 </a:tc>
+                <a:extLst>
+                  <a:ext uri="{0D108BD9-81ED-4DB2-BD59-A6C34878D82A}">
+                    <a16:rowId xmlns:a16="http://schemas.microsoft.com/office/drawing/2014/main" val="10002"/>
+                  </a:ext>
+                </a:extLst>
               </a:tr>
               <a:tr h="246857">
                 <a:tc>
@@ -4031,6 +5957,11 @@
                     </a:solidFill>
                   </a:tcPr>
                 </a:tc>
+                <a:extLst>
+                  <a:ext uri="{0D108BD9-81ED-4DB2-BD59-A6C34878D82A}">
+                    <a16:rowId xmlns:a16="http://schemas.microsoft.com/office/drawing/2014/main" val="10003"/>
+                  </a:ext>
+                </a:extLst>
               </a:tr>
               <a:tr h="246857">
                 <a:tc>
@@ -4128,6 +6059,11 @@
                     </a:solidFill>
                   </a:tcPr>
                 </a:tc>
+                <a:extLst>
+                  <a:ext uri="{0D108BD9-81ED-4DB2-BD59-A6C34878D82A}">
+                    <a16:rowId xmlns:a16="http://schemas.microsoft.com/office/drawing/2014/main" val="10004"/>
+                  </a:ext>
+                </a:extLst>
               </a:tr>
               <a:tr h="246857">
                 <a:tc>
@@ -4225,6 +6161,11 @@
                     </a:solidFill>
                   </a:tcPr>
                 </a:tc>
+                <a:extLst>
+                  <a:ext uri="{0D108BD9-81ED-4DB2-BD59-A6C34878D82A}">
+                    <a16:rowId xmlns:a16="http://schemas.microsoft.com/office/drawing/2014/main" val="10005"/>
+                  </a:ext>
+                </a:extLst>
               </a:tr>
               <a:tr h="246858">
                 <a:tc>
@@ -4322,6 +6263,11 @@
                     </a:solidFill>
                   </a:tcPr>
                 </a:tc>
+                <a:extLst>
+                  <a:ext uri="{0D108BD9-81ED-4DB2-BD59-A6C34878D82A}">
+                    <a16:rowId xmlns:a16="http://schemas.microsoft.com/office/drawing/2014/main" val="10006"/>
+                  </a:ext>
+                </a:extLst>
               </a:tr>
             </a:tbl>
           </a:graphicData>
@@ -4336,7 +6282,7 @@
 </file>
 
 <file path=ppt/slides/slide3.xml><?xml version="1.0" encoding="utf-8"?>
-<p:sld xmlns:a="http://schemas.openxmlformats.org/drawingml/2006/main" xmlns:p="http://schemas.openxmlformats.org/presentationml/2006/main" xmlns:r="http://schemas.openxmlformats.org/officeDocument/2006/relationships">
+<p:sld xmlns:a="http://schemas.openxmlformats.org/drawingml/2006/main" xmlns:r="http://schemas.openxmlformats.org/officeDocument/2006/relationships" xmlns:p="http://schemas.openxmlformats.org/presentationml/2006/main">
   <p:cSld>
     <p:spTree>
       <p:nvGrpSpPr>
@@ -4344,7 +6290,14 @@
         <p:cNvGrpSpPr/>
         <p:nvPr/>
       </p:nvGrpSpPr>
-      <p:grpSpPr/>
+      <p:grpSpPr>
+        <a:xfrm>
+          <a:off x="0" y="0"/>
+          <a:ext cx="0" cy="0"/>
+          <a:chOff x="0" y="0"/>
+          <a:chExt cx="0" cy="0"/>
+        </a:xfrm>
+      </p:grpSpPr>
       <p:sp>
         <p:nvSpPr>
           <p:cNvPr id="2" name="Rectangle 1"/>
@@ -4386,6 +6339,7 @@
           <a:lstStyle/>
           <a:p>
             <a:pPr algn="ctr"/>
+            <a:endParaRPr/>
           </a:p>
         </p:txBody>
       </p:sp>
@@ -4398,7 +6352,7 @@
         <p:spPr>
           <a:xfrm>
             <a:off x="360000" y="251999"/>
-            <a:ext cx="9360000" cy="540000"/>
+            <a:ext cx="9360000" cy="892552"/>
           </a:xfrm>
           <a:prstGeom prst="rect">
             <a:avLst/>
@@ -4409,25 +6363,54 @@
           <a:bodyPr wrap="square">
             <a:spAutoFit/>
           </a:bodyPr>
-          <a:lstStyle/>
-          <a:p>
-            <a:r>
-              <a:rPr sz="1400">
-                <a:solidFill>
-                  <a:srgbClr val="8A929B"/>
-                </a:solidFill>
-                <a:latin typeface="Consolas"/>
-              </a:rPr>
+          <a:lstStyle>
+            <a:defPPr>
+              <a:defRPr lang="en-US"/>
+            </a:defPPr>
+            <a:lvl1pPr>
+              <a:defRPr sz="2000" b="1">
+                <a:solidFill>
+                  <a:srgbClr val="0E5C68"/>
+                </a:solidFill>
+                <a:latin typeface="Arial"/>
+              </a:defRPr>
+            </a:lvl1pPr>
+          </a:lstStyle>
+          <a:p>
+            <a:r>
+              <a:rPr dirty="0"/>
               <a:t>03  </a:t>
             </a:r>
             <a:r>
-              <a:rPr sz="2600" b="1">
-                <a:solidFill>
-                  <a:srgbClr val="0E5C68"/>
-                </a:solidFill>
-                <a:latin typeface="Arial"/>
-              </a:rPr>
-              <a:t>Ensaio 1 — Motor de Pequeno Porte — Zoom na Entrada da Carga (0.1 s antes / 0.2 s depois)</a:t>
+              <a:rPr dirty="0" err="1"/>
+              <a:t>Ensaio</a:t>
+            </a:r>
+            <a:r>
+              <a:rPr dirty="0"/>
+              <a:t> 1 — Motor de Pequeno Porte </a:t>
+            </a:r>
+            <a:endParaRPr lang="pt-BR" dirty="0"/>
+          </a:p>
+          <a:p>
+            <a:r>
+              <a:rPr dirty="0"/>
+              <a:t>— Zoom </a:t>
+            </a:r>
+            <a:r>
+              <a:rPr dirty="0" err="1"/>
+              <a:t>na</a:t>
+            </a:r>
+            <a:r>
+              <a:rPr dirty="0"/>
+              <a:t> Entrada da Carga (0.1 s antes / 0.2 s </a:t>
+            </a:r>
+            <a:r>
+              <a:rPr dirty="0" err="1"/>
+              <a:t>depois</a:t>
+            </a:r>
+            <a:r>
+              <a:rPr dirty="0"/>
+              <a:t>)</a:t>
             </a:r>
           </a:p>
         </p:txBody>
@@ -4448,7 +6431,7 @@
         </p:blipFill>
         <p:spPr>
           <a:xfrm>
-            <a:off x="251999" y="792000"/>
+            <a:off x="251999" y="1164533"/>
             <a:ext cx="4752000" cy="3394286"/>
           </a:xfrm>
           <a:prstGeom prst="rect">
@@ -4472,7 +6455,7 @@
         </p:blipFill>
         <p:spPr>
           <a:xfrm>
-            <a:off x="5076000" y="792000"/>
+            <a:off x="5076000" y="1164533"/>
             <a:ext cx="4752000" cy="3394286"/>
           </a:xfrm>
           <a:prstGeom prst="rect">
@@ -4489,7 +6472,7 @@
 </file>
 
 <file path=ppt/slides/slide4.xml><?xml version="1.0" encoding="utf-8"?>
-<p:sld xmlns:a="http://schemas.openxmlformats.org/drawingml/2006/main" xmlns:p="http://schemas.openxmlformats.org/presentationml/2006/main" xmlns:r="http://schemas.openxmlformats.org/officeDocument/2006/relationships">
+<p:sld xmlns:a="http://schemas.openxmlformats.org/drawingml/2006/main" xmlns:r="http://schemas.openxmlformats.org/officeDocument/2006/relationships" xmlns:p="http://schemas.openxmlformats.org/presentationml/2006/main">
   <p:cSld>
     <p:spTree>
       <p:nvGrpSpPr>
@@ -4497,7 +6480,14 @@
         <p:cNvGrpSpPr/>
         <p:nvPr/>
       </p:nvGrpSpPr>
-      <p:grpSpPr/>
+      <p:grpSpPr>
+        <a:xfrm>
+          <a:off x="0" y="0"/>
+          <a:ext cx="0" cy="0"/>
+          <a:chOff x="0" y="0"/>
+          <a:chExt cx="0" cy="0"/>
+        </a:xfrm>
+      </p:grpSpPr>
       <p:sp>
         <p:nvSpPr>
           <p:cNvPr id="2" name="Rectangle 1"/>
@@ -4539,6 +6529,7 @@
           <a:lstStyle/>
           <a:p>
             <a:pPr algn="ctr"/>
+            <a:endParaRPr/>
           </a:p>
         </p:txBody>
       </p:sp>
@@ -4551,7 +6542,7 @@
         <p:spPr>
           <a:xfrm>
             <a:off x="360000" y="251999"/>
-            <a:ext cx="9360000" cy="540000"/>
+            <a:ext cx="9360000" cy="400110"/>
           </a:xfrm>
           <a:prstGeom prst="rect">
             <a:avLst/>
@@ -4565,22 +6556,58 @@
           <a:lstStyle/>
           <a:p>
             <a:r>
-              <a:rPr sz="1400">
+              <a:rPr sz="2000" b="1" dirty="0">
+                <a:solidFill>
+                  <a:srgbClr val="0E5C68"/>
+                </a:solidFill>
+                <a:latin typeface="Arial"/>
+              </a:rPr>
+              <a:t>04</a:t>
+            </a:r>
+            <a:r>
+              <a:rPr sz="2000" dirty="0">
                 <a:solidFill>
                   <a:srgbClr val="8A929B"/>
                 </a:solidFill>
                 <a:latin typeface="Consolas"/>
               </a:rPr>
-              <a:t>04  </a:t>
-            </a:r>
-            <a:r>
-              <a:rPr sz="2600" b="1">
+              <a:t>  </a:t>
+            </a:r>
+            <a:r>
+              <a:rPr sz="2000" b="1" dirty="0" err="1">
                 <a:solidFill>
                   <a:srgbClr val="0E5C68"/>
                 </a:solidFill>
                 <a:latin typeface="Arial"/>
               </a:rPr>
-              <a:t>Ensaio 1 — Motor de Grande Porte — Degrau de Carga (60 Hz)</a:t>
+              <a:t>Ensaio</a:t>
+            </a:r>
+            <a:r>
+              <a:rPr sz="2000" b="1" dirty="0">
+                <a:solidFill>
+                  <a:srgbClr val="0E5C68"/>
+                </a:solidFill>
+                <a:latin typeface="Arial"/>
+              </a:rPr>
+              <a:t> 1 — Motor de Grande Porte — </a:t>
+            </a:r>
+            <a:r>
+              <a:rPr sz="2000" b="1" dirty="0" err="1">
+                <a:solidFill>
+                  <a:srgbClr val="0E5C68"/>
+                </a:solidFill>
+                <a:latin typeface="Arial"/>
+              </a:rPr>
+              <a:t>Degrau</a:t>
+            </a:r>
+            <a:r>
+              <a:rPr sz="2000" b="1" dirty="0">
+                <a:solidFill>
+                  <a:srgbClr val="0E5C68"/>
+                </a:solidFill>
+                <a:latin typeface="Arial"/>
+              </a:rPr>
+              <a:t> de Carga (60 Hz)</a:t>
             </a:r>
           </a:p>
         </p:txBody>
@@ -4639,10 +6666,16 @@
           <p:cNvGraphicFramePr>
             <a:graphicFrameLocks noGrp="1"/>
           </p:cNvGraphicFramePr>
-          <p:nvPr/>
+          <p:nvPr>
+            <p:extLst>
+              <p:ext uri="{D42A27DB-BD31-4B8C-83A1-F6EECF244321}">
+                <p14:modId xmlns:p14="http://schemas.microsoft.com/office/powerpoint/2010/main" val="597077118"/>
+              </p:ext>
+            </p:extLst>
+          </p:nvPr>
         </p:nvGraphicFramePr>
         <p:xfrm>
-          <a:off x="251999" y="3671999"/>
+          <a:off x="215999" y="3988287"/>
           <a:ext cx="9576000" cy="1728000"/>
         </p:xfrm>
         <a:graphic>
@@ -4652,11 +6685,41 @@
                 <a:tableStyleId>{5C22544A-7EE6-4342-B048-85BDC9FD1C3A}</a:tableStyleId>
               </a:tblPr>
               <a:tblGrid>
-                <a:gridCol w="1915200"/>
-                <a:gridCol w="1915200"/>
-                <a:gridCol w="1915200"/>
-                <a:gridCol w="1915200"/>
-                <a:gridCol w="1915200"/>
+                <a:gridCol w="1915200">
+                  <a:extLst>
+                    <a:ext uri="{9D8B030D-6E8A-4147-A177-3AD203B41FA5}">
+                      <a16:colId xmlns:a16="http://schemas.microsoft.com/office/drawing/2014/main" val="20000"/>
+                    </a:ext>
+                  </a:extLst>
+                </a:gridCol>
+                <a:gridCol w="1915200">
+                  <a:extLst>
+                    <a:ext uri="{9D8B030D-6E8A-4147-A177-3AD203B41FA5}">
+                      <a16:colId xmlns:a16="http://schemas.microsoft.com/office/drawing/2014/main" val="20001"/>
+                    </a:ext>
+                  </a:extLst>
+                </a:gridCol>
+                <a:gridCol w="1915200">
+                  <a:extLst>
+                    <a:ext uri="{9D8B030D-6E8A-4147-A177-3AD203B41FA5}">
+                      <a16:colId xmlns:a16="http://schemas.microsoft.com/office/drawing/2014/main" val="20002"/>
+                    </a:ext>
+                  </a:extLst>
+                </a:gridCol>
+                <a:gridCol w="1915200">
+                  <a:extLst>
+                    <a:ext uri="{9D8B030D-6E8A-4147-A177-3AD203B41FA5}">
+                      <a16:colId xmlns:a16="http://schemas.microsoft.com/office/drawing/2014/main" val="20003"/>
+                    </a:ext>
+                  </a:extLst>
+                </a:gridCol>
+                <a:gridCol w="1915200">
+                  <a:extLst>
+                    <a:ext uri="{9D8B030D-6E8A-4147-A177-3AD203B41FA5}">
+                      <a16:colId xmlns:a16="http://schemas.microsoft.com/office/drawing/2014/main" val="20004"/>
+                    </a:ext>
+                  </a:extLst>
+                </a:gridCol>
               </a:tblGrid>
               <a:tr h="246857">
                 <a:tc>
@@ -4703,10 +6766,41 @@
                     <a:lstStyle/>
                     <a:p>
                       <a:r>
+                        <a:rPr sz="900" b="1" dirty="0">
+                          <a:latin typeface="Arial"/>
+                        </a:rPr>
+                        <a:t>Tempo de </a:t>
+                      </a:r>
+                      <a:r>
+                        <a:rPr sz="900" b="1" dirty="0" err="1">
+                          <a:latin typeface="Arial"/>
+                        </a:rPr>
+                        <a:t>acomodação</a:t>
+                      </a:r>
+                      <a:r>
+                        <a:rPr sz="900" b="1" dirty="0">
+                          <a:latin typeface="Arial"/>
+                        </a:rPr>
+                        <a:t> (s)</a:t>
+                      </a:r>
+                    </a:p>
+                  </a:txBody>
+                  <a:tcPr>
+                    <a:solidFill>
+                      <a:srgbClr val="E3EEF0"/>
+                    </a:solidFill>
+                  </a:tcPr>
+                </a:tc>
+                <a:tc>
+                  <a:txBody>
+                    <a:bodyPr/>
+                    <a:lstStyle/>
+                    <a:p>
+                      <a:r>
                         <a:rPr sz="900" b="1">
                           <a:latin typeface="Arial"/>
                         </a:rPr>
-                        <a:t>Tempo de acomodação (s)</a:t>
+                        <a:t>Erro de regime</a:t>
                       </a:r>
                     </a:p>
                   </a:txBody>
@@ -4725,7 +6819,7 @@
                         <a:rPr sz="900" b="1">
                           <a:latin typeface="Arial"/>
                         </a:rPr>
-                        <a:t>Erro de regime</a:t>
+                        <a:t>Sobressinal (%)</a:t>
                       </a:r>
                     </a:p>
                   </a:txBody>
@@ -4735,25 +6829,11 @@
                     </a:solidFill>
                   </a:tcPr>
                 </a:tc>
-                <a:tc>
-                  <a:txBody>
-                    <a:bodyPr/>
-                    <a:lstStyle/>
-                    <a:p>
-                      <a:r>
-                        <a:rPr sz="900" b="1">
-                          <a:latin typeface="Arial"/>
-                        </a:rPr>
-                        <a:t>Sobressinal (%)</a:t>
-                      </a:r>
-                    </a:p>
-                  </a:txBody>
-                  <a:tcPr>
-                    <a:solidFill>
-                      <a:srgbClr val="E3EEF0"/>
-                    </a:solidFill>
-                  </a:tcPr>
-                </a:tc>
+                <a:extLst>
+                  <a:ext uri="{0D108BD9-81ED-4DB2-BD59-A6C34878D82A}">
+                    <a16:rowId xmlns:a16="http://schemas.microsoft.com/office/drawing/2014/main" val="10000"/>
+                  </a:ext>
+                </a:extLst>
               </a:tr>
               <a:tr h="246857">
                 <a:tc>
@@ -4851,6 +6931,11 @@
                     </a:solidFill>
                   </a:tcPr>
                 </a:tc>
+                <a:extLst>
+                  <a:ext uri="{0D108BD9-81ED-4DB2-BD59-A6C34878D82A}">
+                    <a16:rowId xmlns:a16="http://schemas.microsoft.com/office/drawing/2014/main" val="10001"/>
+                  </a:ext>
+                </a:extLst>
               </a:tr>
               <a:tr h="246857">
                 <a:tc>
@@ -4948,6 +7033,11 @@
                     </a:solidFill>
                   </a:tcPr>
                 </a:tc>
+                <a:extLst>
+                  <a:ext uri="{0D108BD9-81ED-4DB2-BD59-A6C34878D82A}">
+                    <a16:rowId xmlns:a16="http://schemas.microsoft.com/office/drawing/2014/main" val="10002"/>
+                  </a:ext>
+                </a:extLst>
               </a:tr>
               <a:tr h="246857">
                 <a:tc>
@@ -5045,6 +7135,11 @@
                     </a:solidFill>
                   </a:tcPr>
                 </a:tc>
+                <a:extLst>
+                  <a:ext uri="{0D108BD9-81ED-4DB2-BD59-A6C34878D82A}">
+                    <a16:rowId xmlns:a16="http://schemas.microsoft.com/office/drawing/2014/main" val="10003"/>
+                  </a:ext>
+                </a:extLst>
               </a:tr>
               <a:tr h="246857">
                 <a:tc>
@@ -5142,6 +7237,11 @@
                     </a:solidFill>
                   </a:tcPr>
                 </a:tc>
+                <a:extLst>
+                  <a:ext uri="{0D108BD9-81ED-4DB2-BD59-A6C34878D82A}">
+                    <a16:rowId xmlns:a16="http://schemas.microsoft.com/office/drawing/2014/main" val="10004"/>
+                  </a:ext>
+                </a:extLst>
               </a:tr>
               <a:tr h="246857">
                 <a:tc>
@@ -5239,6 +7339,11 @@
                     </a:solidFill>
                   </a:tcPr>
                 </a:tc>
+                <a:extLst>
+                  <a:ext uri="{0D108BD9-81ED-4DB2-BD59-A6C34878D82A}">
+                    <a16:rowId xmlns:a16="http://schemas.microsoft.com/office/drawing/2014/main" val="10005"/>
+                  </a:ext>
+                </a:extLst>
               </a:tr>
               <a:tr h="246858">
                 <a:tc>
@@ -5323,7 +7428,7 @@
                     <a:lstStyle/>
                     <a:p>
                       <a:r>
-                        <a:rPr sz="850">
+                        <a:rPr sz="850" dirty="0">
                           <a:latin typeface="Arial"/>
                         </a:rPr>
                         <a:t>-65.63</a:t>
@@ -5336,6 +7441,11 @@
                     </a:solidFill>
                   </a:tcPr>
                 </a:tc>
+                <a:extLst>
+                  <a:ext uri="{0D108BD9-81ED-4DB2-BD59-A6C34878D82A}">
+                    <a16:rowId xmlns:a16="http://schemas.microsoft.com/office/drawing/2014/main" val="10006"/>
+                  </a:ext>
+                </a:extLst>
               </a:tr>
             </a:tbl>
           </a:graphicData>
@@ -5350,7 +7460,7 @@
 </file>
 
 <file path=ppt/slides/slide5.xml><?xml version="1.0" encoding="utf-8"?>
-<p:sld xmlns:a="http://schemas.openxmlformats.org/drawingml/2006/main" xmlns:p="http://schemas.openxmlformats.org/presentationml/2006/main" xmlns:r="http://schemas.openxmlformats.org/officeDocument/2006/relationships">
+<p:sld xmlns:a="http://schemas.openxmlformats.org/drawingml/2006/main" xmlns:r="http://schemas.openxmlformats.org/officeDocument/2006/relationships" xmlns:p="http://schemas.openxmlformats.org/presentationml/2006/main">
   <p:cSld>
     <p:spTree>
       <p:nvGrpSpPr>
@@ -5358,7 +7468,14 @@
         <p:cNvGrpSpPr/>
         <p:nvPr/>
       </p:nvGrpSpPr>
-      <p:grpSpPr/>
+      <p:grpSpPr>
+        <a:xfrm>
+          <a:off x="0" y="0"/>
+          <a:ext cx="0" cy="0"/>
+          <a:chOff x="0" y="0"/>
+          <a:chExt cx="0" cy="0"/>
+        </a:xfrm>
+      </p:grpSpPr>
       <p:sp>
         <p:nvSpPr>
           <p:cNvPr id="2" name="Rectangle 1"/>
@@ -5400,6 +7517,7 @@
           <a:lstStyle/>
           <a:p>
             <a:pPr algn="ctr"/>
+            <a:endParaRPr/>
           </a:p>
         </p:txBody>
       </p:sp>
@@ -5423,25 +7541,54 @@
           <a:bodyPr wrap="square">
             <a:spAutoFit/>
           </a:bodyPr>
-          <a:lstStyle/>
-          <a:p>
-            <a:r>
-              <a:rPr sz="1400">
-                <a:solidFill>
-                  <a:srgbClr val="8A929B"/>
-                </a:solidFill>
-                <a:latin typeface="Consolas"/>
-              </a:rPr>
+          <a:lstStyle>
+            <a:defPPr>
+              <a:defRPr lang="en-US"/>
+            </a:defPPr>
+            <a:lvl1pPr>
+              <a:defRPr sz="2000" b="1">
+                <a:solidFill>
+                  <a:srgbClr val="0E5C68"/>
+                </a:solidFill>
+                <a:latin typeface="Arial"/>
+              </a:defRPr>
+            </a:lvl1pPr>
+          </a:lstStyle>
+          <a:p>
+            <a:r>
+              <a:rPr dirty="0"/>
               <a:t>05  </a:t>
             </a:r>
             <a:r>
-              <a:rPr sz="2600" b="1">
-                <a:solidFill>
-                  <a:srgbClr val="0E5C68"/>
-                </a:solidFill>
-                <a:latin typeface="Arial"/>
-              </a:rPr>
-              <a:t>Ensaio 1 — Motor de Grande Porte — Zoom na Entrada da Carga (0.5 s antes / 1 s depois)</a:t>
+              <a:rPr dirty="0" err="1"/>
+              <a:t>Ensaio</a:t>
+            </a:r>
+            <a:r>
+              <a:rPr dirty="0"/>
+              <a:t> 1 — Motor de Grande Porte </a:t>
+            </a:r>
+            <a:endParaRPr lang="pt-BR" dirty="0"/>
+          </a:p>
+          <a:p>
+            <a:r>
+              <a:rPr dirty="0"/>
+              <a:t>— Zoom </a:t>
+            </a:r>
+            <a:r>
+              <a:rPr dirty="0" err="1"/>
+              <a:t>na</a:t>
+            </a:r>
+            <a:r>
+              <a:rPr dirty="0"/>
+              <a:t> Entrada da Carga (0.5 s antes / 1 s </a:t>
+            </a:r>
+            <a:r>
+              <a:rPr dirty="0" err="1"/>
+              <a:t>depois</a:t>
+            </a:r>
+            <a:r>
+              <a:rPr dirty="0"/>
+              <a:t>)</a:t>
             </a:r>
           </a:p>
         </p:txBody>
@@ -5462,7 +7609,7 @@
         </p:blipFill>
         <p:spPr>
           <a:xfrm>
-            <a:off x="251999" y="792000"/>
+            <a:off x="251999" y="1393134"/>
             <a:ext cx="4752000" cy="3394286"/>
           </a:xfrm>
           <a:prstGeom prst="rect">
@@ -5486,7 +7633,7 @@
         </p:blipFill>
         <p:spPr>
           <a:xfrm>
-            <a:off x="5076000" y="792000"/>
+            <a:off x="5076000" y="1393134"/>
             <a:ext cx="4752000" cy="3394286"/>
           </a:xfrm>
           <a:prstGeom prst="rect">
@@ -5503,7 +7650,7 @@
 </file>
 
 <file path=ppt/slides/slide6.xml><?xml version="1.0" encoding="utf-8"?>
-<p:sld xmlns:a="http://schemas.openxmlformats.org/drawingml/2006/main" xmlns:p="http://schemas.openxmlformats.org/presentationml/2006/main" xmlns:r="http://schemas.openxmlformats.org/officeDocument/2006/relationships">
+<p:sld xmlns:a="http://schemas.openxmlformats.org/drawingml/2006/main" xmlns:r="http://schemas.openxmlformats.org/officeDocument/2006/relationships" xmlns:p="http://schemas.openxmlformats.org/presentationml/2006/main">
   <p:cSld>
     <p:spTree>
       <p:nvGrpSpPr>
@@ -5511,7 +7658,14 @@
         <p:cNvGrpSpPr/>
         <p:nvPr/>
       </p:nvGrpSpPr>
-      <p:grpSpPr/>
+      <p:grpSpPr>
+        <a:xfrm>
+          <a:off x="0" y="0"/>
+          <a:ext cx="0" cy="0"/>
+          <a:chOff x="0" y="0"/>
+          <a:chExt cx="0" cy="0"/>
+        </a:xfrm>
+      </p:grpSpPr>
       <p:sp>
         <p:nvSpPr>
           <p:cNvPr id="2" name="Rectangle 1"/>
@@ -5553,6 +7707,7 @@
           <a:lstStyle/>
           <a:p>
             <a:pPr algn="ctr"/>
+            <a:endParaRPr/>
           </a:p>
         </p:txBody>
       </p:sp>
@@ -5576,25 +7731,54 @@
           <a:bodyPr wrap="square">
             <a:spAutoFit/>
           </a:bodyPr>
-          <a:lstStyle/>
-          <a:p>
-            <a:r>
-              <a:rPr sz="1400">
-                <a:solidFill>
-                  <a:srgbClr val="8A929B"/>
-                </a:solidFill>
-                <a:latin typeface="Consolas"/>
-              </a:rPr>
+          <a:lstStyle>
+            <a:defPPr>
+              <a:defRPr lang="en-US"/>
+            </a:defPPr>
+            <a:lvl1pPr>
+              <a:defRPr sz="2000" b="1">
+                <a:solidFill>
+                  <a:srgbClr val="0E5C68"/>
+                </a:solidFill>
+                <a:latin typeface="Arial"/>
+              </a:defRPr>
+            </a:lvl1pPr>
+          </a:lstStyle>
+          <a:p>
+            <a:r>
+              <a:rPr dirty="0"/>
               <a:t>06  </a:t>
             </a:r>
             <a:r>
-              <a:rPr sz="2600" b="1">
-                <a:solidFill>
-                  <a:srgbClr val="0E5C68"/>
-                </a:solidFill>
-                <a:latin typeface="Arial"/>
-              </a:rPr>
-              <a:t>Ensaio 2 — Motor de Pequeno Porte — Degrau de Carga a 50% da Velocidade (30 Hz)</a:t>
+              <a:rPr dirty="0" err="1"/>
+              <a:t>Ensaio</a:t>
+            </a:r>
+            <a:r>
+              <a:rPr dirty="0"/>
+              <a:t> 2 — Motor de Pequeno Porte </a:t>
+            </a:r>
+            <a:endParaRPr lang="pt-BR" dirty="0"/>
+          </a:p>
+          <a:p>
+            <a:r>
+              <a:rPr dirty="0"/>
+              <a:t>— </a:t>
+            </a:r>
+            <a:r>
+              <a:rPr dirty="0" err="1"/>
+              <a:t>Degrau</a:t>
+            </a:r>
+            <a:r>
+              <a:rPr dirty="0"/>
+              <a:t> de Carga a 50% da </a:t>
+            </a:r>
+            <a:r>
+              <a:rPr dirty="0" err="1"/>
+              <a:t>Velocidade</a:t>
+            </a:r>
+            <a:r>
+              <a:rPr dirty="0"/>
+              <a:t> (30 Hz)</a:t>
             </a:r>
           </a:p>
         </p:txBody>
@@ -5609,14 +7793,15 @@
         </p:nvPicPr>
         <p:blipFill>
           <a:blip r:embed="rId2"/>
+          <a:srcRect t="4946"/>
           <a:stretch>
             <a:fillRect/>
           </a:stretch>
         </p:blipFill>
         <p:spPr>
           <a:xfrm>
-            <a:off x="251999" y="792000"/>
-            <a:ext cx="4752000" cy="3394286"/>
+            <a:off x="251999" y="959884"/>
+            <a:ext cx="4752000" cy="3226401"/>
           </a:xfrm>
           <a:prstGeom prst="rect">
             <a:avLst/>
@@ -5633,14 +7818,15 @@
         </p:nvPicPr>
         <p:blipFill>
           <a:blip r:embed="rId3"/>
+          <a:srcRect t="4946"/>
           <a:stretch>
             <a:fillRect/>
           </a:stretch>
         </p:blipFill>
         <p:spPr>
           <a:xfrm>
-            <a:off x="5076000" y="792000"/>
-            <a:ext cx="4752000" cy="3394286"/>
+            <a:off x="5040312" y="959883"/>
+            <a:ext cx="4752000" cy="3226402"/>
           </a:xfrm>
           <a:prstGeom prst="rect">
             <a:avLst/>
@@ -5653,10 +7839,16 @@
           <p:cNvGraphicFramePr>
             <a:graphicFrameLocks noGrp="1"/>
           </p:cNvGraphicFramePr>
-          <p:nvPr/>
+          <p:nvPr>
+            <p:extLst>
+              <p:ext uri="{D42A27DB-BD31-4B8C-83A1-F6EECF244321}">
+                <p14:modId xmlns:p14="http://schemas.microsoft.com/office/powerpoint/2010/main" val="3122518780"/>
+              </p:ext>
+            </p:extLst>
+          </p:nvPr>
         </p:nvGraphicFramePr>
         <p:xfrm>
-          <a:off x="251999" y="3671999"/>
+          <a:off x="251999" y="3862287"/>
           <a:ext cx="9576000" cy="1728000"/>
         </p:xfrm>
         <a:graphic>
@@ -5666,11 +7858,41 @@
                 <a:tableStyleId>{5C22544A-7EE6-4342-B048-85BDC9FD1C3A}</a:tableStyleId>
               </a:tblPr>
               <a:tblGrid>
-                <a:gridCol w="1915200"/>
-                <a:gridCol w="1915200"/>
-                <a:gridCol w="1915200"/>
-                <a:gridCol w="1915200"/>
-                <a:gridCol w="1915200"/>
+                <a:gridCol w="1915200">
+                  <a:extLst>
+                    <a:ext uri="{9D8B030D-6E8A-4147-A177-3AD203B41FA5}">
+                      <a16:colId xmlns:a16="http://schemas.microsoft.com/office/drawing/2014/main" val="20000"/>
+                    </a:ext>
+                  </a:extLst>
+                </a:gridCol>
+                <a:gridCol w="1915200">
+                  <a:extLst>
+                    <a:ext uri="{9D8B030D-6E8A-4147-A177-3AD203B41FA5}">
+                      <a16:colId xmlns:a16="http://schemas.microsoft.com/office/drawing/2014/main" val="20001"/>
+                    </a:ext>
+                  </a:extLst>
+                </a:gridCol>
+                <a:gridCol w="1915200">
+                  <a:extLst>
+                    <a:ext uri="{9D8B030D-6E8A-4147-A177-3AD203B41FA5}">
+                      <a16:colId xmlns:a16="http://schemas.microsoft.com/office/drawing/2014/main" val="20002"/>
+                    </a:ext>
+                  </a:extLst>
+                </a:gridCol>
+                <a:gridCol w="1915200">
+                  <a:extLst>
+                    <a:ext uri="{9D8B030D-6E8A-4147-A177-3AD203B41FA5}">
+                      <a16:colId xmlns:a16="http://schemas.microsoft.com/office/drawing/2014/main" val="20003"/>
+                    </a:ext>
+                  </a:extLst>
+                </a:gridCol>
+                <a:gridCol w="1915200">
+                  <a:extLst>
+                    <a:ext uri="{9D8B030D-6E8A-4147-A177-3AD203B41FA5}">
+                      <a16:colId xmlns:a16="http://schemas.microsoft.com/office/drawing/2014/main" val="20004"/>
+                    </a:ext>
+                  </a:extLst>
+                </a:gridCol>
               </a:tblGrid>
               <a:tr h="345600">
                 <a:tc>
@@ -5679,64 +7901,84 @@
                     <a:lstStyle/>
                     <a:p>
                       <a:r>
-                        <a:rPr sz="900" b="1">
+                        <a:rPr sz="900" b="1" dirty="0" err="1">
                           <a:latin typeface="Arial"/>
                         </a:rPr>
                         <a:t>Ensaio</a:t>
                       </a:r>
-                    </a:p>
-                  </a:txBody>
-                  <a:tcPr>
-                    <a:solidFill>
-                      <a:srgbClr val="E3EEF0"/>
-                    </a:solidFill>
-                  </a:tcPr>
-                </a:tc>
-                <a:tc>
-                  <a:txBody>
-                    <a:bodyPr/>
-                    <a:lstStyle/>
-                    <a:p>
-                      <a:r>
-                        <a:rPr sz="900" b="1">
+                      <a:endParaRPr sz="900" b="1" dirty="0">
+                        <a:latin typeface="Arial"/>
+                      </a:endParaRPr>
+                    </a:p>
+                  </a:txBody>
+                  <a:tcPr>
+                    <a:solidFill>
+                      <a:srgbClr val="0E5C68"/>
+                    </a:solidFill>
+                  </a:tcPr>
+                </a:tc>
+                <a:tc>
+                  <a:txBody>
+                    <a:bodyPr/>
+                    <a:lstStyle/>
+                    <a:p>
+                      <a:r>
+                        <a:rPr sz="900" b="1" dirty="0" err="1">
                           <a:latin typeface="Arial"/>
                         </a:rPr>
                         <a:t>Cenário</a:t>
                       </a:r>
-                    </a:p>
-                  </a:txBody>
-                  <a:tcPr>
-                    <a:solidFill>
-                      <a:srgbClr val="E3EEF0"/>
-                    </a:solidFill>
-                  </a:tcPr>
-                </a:tc>
-                <a:tc>
-                  <a:txBody>
-                    <a:bodyPr/>
-                    <a:lstStyle/>
-                    <a:p>
-                      <a:r>
-                        <a:rPr sz="900" b="1">
-                          <a:latin typeface="Arial"/>
-                        </a:rPr>
-                        <a:t>Tempo de acomodação (s)</a:t>
-                      </a:r>
-                    </a:p>
-                  </a:txBody>
-                  <a:tcPr>
-                    <a:solidFill>
-                      <a:srgbClr val="E3EEF0"/>
-                    </a:solidFill>
-                  </a:tcPr>
-                </a:tc>
-                <a:tc>
-                  <a:txBody>
-                    <a:bodyPr/>
-                    <a:lstStyle/>
-                    <a:p>
-                      <a:r>
-                        <a:rPr sz="900" b="1">
+                      <a:endParaRPr sz="900" b="1" dirty="0">
+                        <a:latin typeface="Arial"/>
+                      </a:endParaRPr>
+                    </a:p>
+                  </a:txBody>
+                  <a:tcPr>
+                    <a:solidFill>
+                      <a:srgbClr val="0E5C68"/>
+                    </a:solidFill>
+                  </a:tcPr>
+                </a:tc>
+                <a:tc>
+                  <a:txBody>
+                    <a:bodyPr/>
+                    <a:lstStyle/>
+                    <a:p>
+                      <a:pPr algn="ctr"/>
+                      <a:r>
+                        <a:rPr sz="900" b="1" dirty="0">
+                          <a:latin typeface="Arial"/>
+                        </a:rPr>
+                        <a:t>Tempo de </a:t>
+                      </a:r>
+                      <a:r>
+                        <a:rPr sz="900" b="1" dirty="0" err="1">
+                          <a:latin typeface="Arial"/>
+                        </a:rPr>
+                        <a:t>acomodação</a:t>
+                      </a:r>
+                      <a:r>
+                        <a:rPr sz="900" b="1" dirty="0">
+                          <a:latin typeface="Arial"/>
+                        </a:rPr>
+                        <a:t> (s)</a:t>
+                      </a:r>
+                    </a:p>
+                  </a:txBody>
+                  <a:tcPr>
+                    <a:solidFill>
+                      <a:srgbClr val="0E5C68"/>
+                    </a:solidFill>
+                  </a:tcPr>
+                </a:tc>
+                <a:tc>
+                  <a:txBody>
+                    <a:bodyPr/>
+                    <a:lstStyle/>
+                    <a:p>
+                      <a:pPr algn="ctr"/>
+                      <a:r>
+                        <a:rPr sz="900" b="1" dirty="0">
                           <a:latin typeface="Arial"/>
                         </a:rPr>
                         <a:t>Erro de regime</a:t>
@@ -5745,29 +7987,41 @@
                   </a:txBody>
                   <a:tcPr>
                     <a:solidFill>
-                      <a:srgbClr val="E3EEF0"/>
-                    </a:solidFill>
-                  </a:tcPr>
-                </a:tc>
-                <a:tc>
-                  <a:txBody>
-                    <a:bodyPr/>
-                    <a:lstStyle/>
-                    <a:p>
-                      <a:r>
-                        <a:rPr sz="900" b="1">
-                          <a:latin typeface="Arial"/>
-                        </a:rPr>
-                        <a:t>Sobressinal (%)</a:t>
-                      </a:r>
-                    </a:p>
-                  </a:txBody>
-                  <a:tcPr>
-                    <a:solidFill>
-                      <a:srgbClr val="E3EEF0"/>
-                    </a:solidFill>
-                  </a:tcPr>
-                </a:tc>
+                      <a:srgbClr val="0E5C68"/>
+                    </a:solidFill>
+                  </a:tcPr>
+                </a:tc>
+                <a:tc>
+                  <a:txBody>
+                    <a:bodyPr/>
+                    <a:lstStyle/>
+                    <a:p>
+                      <a:pPr algn="ctr"/>
+                      <a:r>
+                        <a:rPr sz="900" b="1" dirty="0" err="1">
+                          <a:latin typeface="Arial"/>
+                        </a:rPr>
+                        <a:t>Sobressinal</a:t>
+                      </a:r>
+                      <a:r>
+                        <a:rPr sz="900" b="1" dirty="0">
+                          <a:latin typeface="Arial"/>
+                        </a:rPr>
+                        <a:t> (%)</a:t>
+                      </a:r>
+                    </a:p>
+                  </a:txBody>
+                  <a:tcPr>
+                    <a:solidFill>
+                      <a:srgbClr val="0E5C68"/>
+                    </a:solidFill>
+                  </a:tcPr>
+                </a:tc>
+                <a:extLst>
+                  <a:ext uri="{0D108BD9-81ED-4DB2-BD59-A6C34878D82A}">
+                    <a16:rowId xmlns:a16="http://schemas.microsoft.com/office/drawing/2014/main" val="10000"/>
+                  </a:ext>
+                </a:extLst>
               </a:tr>
               <a:tr h="345600">
                 <a:tc>
@@ -5813,11 +8067,32 @@
                     <a:bodyPr/>
                     <a:lstStyle/>
                     <a:p>
+                      <a:pPr algn="ctr"/>
+                      <a:r>
+                        <a:rPr sz="850" dirty="0">
+                          <a:latin typeface="Arial"/>
+                        </a:rPr>
+                        <a:t>0.1753</a:t>
+                      </a:r>
+                    </a:p>
+                  </a:txBody>
+                  <a:tcPr>
+                    <a:solidFill>
+                      <a:srgbClr val="FFFFFF"/>
+                    </a:solidFill>
+                  </a:tcPr>
+                </a:tc>
+                <a:tc>
+                  <a:txBody>
+                    <a:bodyPr/>
+                    <a:lstStyle/>
+                    <a:p>
+                      <a:pPr algn="ctr"/>
                       <a:r>
                         <a:rPr sz="850">
                           <a:latin typeface="Arial"/>
                         </a:rPr>
-                        <a:t>0.1753</a:t>
+                        <a:t>0.002497</a:t>
                       </a:r>
                     </a:p>
                   </a:txBody>
@@ -5832,11 +8107,12 @@
                     <a:bodyPr/>
                     <a:lstStyle/>
                     <a:p>
+                      <a:pPr algn="ctr"/>
                       <a:r>
                         <a:rPr sz="850">
                           <a:latin typeface="Arial"/>
                         </a:rPr>
-                        <a:t>0.002497</a:t>
+                        <a:t>-93.83</a:t>
                       </a:r>
                     </a:p>
                   </a:txBody>
@@ -5846,25 +8122,11 @@
                     </a:solidFill>
                   </a:tcPr>
                 </a:tc>
-                <a:tc>
-                  <a:txBody>
-                    <a:bodyPr/>
-                    <a:lstStyle/>
-                    <a:p>
-                      <a:r>
-                        <a:rPr sz="850">
-                          <a:latin typeface="Arial"/>
-                        </a:rPr>
-                        <a:t>-93.83</a:t>
-                      </a:r>
-                    </a:p>
-                  </a:txBody>
-                  <a:tcPr>
-                    <a:solidFill>
-                      <a:srgbClr val="FFFFFF"/>
-                    </a:solidFill>
-                  </a:tcPr>
-                </a:tc>
+                <a:extLst>
+                  <a:ext uri="{0D108BD9-81ED-4DB2-BD59-A6C34878D82A}">
+                    <a16:rowId xmlns:a16="http://schemas.microsoft.com/office/drawing/2014/main" val="10001"/>
+                  </a:ext>
+                </a:extLst>
               </a:tr>
               <a:tr h="345600">
                 <a:tc>
@@ -5910,6 +8172,7 @@
                     <a:bodyPr/>
                     <a:lstStyle/>
                     <a:p>
+                      <a:pPr algn="ctr"/>
                       <a:r>
                         <a:rPr sz="850">
                           <a:latin typeface="Arial"/>
@@ -5929,6 +8192,7 @@
                     <a:bodyPr/>
                     <a:lstStyle/>
                     <a:p>
+                      <a:pPr algn="ctr"/>
                       <a:r>
                         <a:rPr sz="850">
                           <a:latin typeface="Arial"/>
@@ -5948,6 +8212,7 @@
                     <a:bodyPr/>
                     <a:lstStyle/>
                     <a:p>
+                      <a:pPr algn="ctr"/>
                       <a:r>
                         <a:rPr sz="850">
                           <a:latin typeface="Arial"/>
@@ -5962,6 +8227,11 @@
                     </a:solidFill>
                   </a:tcPr>
                 </a:tc>
+                <a:extLst>
+                  <a:ext uri="{0D108BD9-81ED-4DB2-BD59-A6C34878D82A}">
+                    <a16:rowId xmlns:a16="http://schemas.microsoft.com/office/drawing/2014/main" val="10002"/>
+                  </a:ext>
+                </a:extLst>
               </a:tr>
               <a:tr h="345600">
                 <a:tc>
@@ -6007,6 +8277,7 @@
                     <a:bodyPr/>
                     <a:lstStyle/>
                     <a:p>
+                      <a:pPr algn="ctr"/>
                       <a:r>
                         <a:rPr sz="850">
                           <a:latin typeface="Arial"/>
@@ -6026,6 +8297,7 @@
                     <a:bodyPr/>
                     <a:lstStyle/>
                     <a:p>
+                      <a:pPr algn="ctr"/>
                       <a:r>
                         <a:rPr sz="850">
                           <a:latin typeface="Arial"/>
@@ -6045,6 +8317,7 @@
                     <a:bodyPr/>
                     <a:lstStyle/>
                     <a:p>
+                      <a:pPr algn="ctr"/>
                       <a:r>
                         <a:rPr sz="850">
                           <a:latin typeface="Arial"/>
@@ -6059,6 +8332,11 @@
                     </a:solidFill>
                   </a:tcPr>
                 </a:tc>
+                <a:extLst>
+                  <a:ext uri="{0D108BD9-81ED-4DB2-BD59-A6C34878D82A}">
+                    <a16:rowId xmlns:a16="http://schemas.microsoft.com/office/drawing/2014/main" val="10003"/>
+                  </a:ext>
+                </a:extLst>
               </a:tr>
               <a:tr h="345600">
                 <a:tc>
@@ -6104,6 +8382,7 @@
                     <a:bodyPr/>
                     <a:lstStyle/>
                     <a:p>
+                      <a:pPr algn="ctr"/>
                       <a:r>
                         <a:rPr sz="850">
                           <a:latin typeface="Arial"/>
@@ -6123,6 +8402,7 @@
                     <a:bodyPr/>
                     <a:lstStyle/>
                     <a:p>
+                      <a:pPr algn="ctr"/>
                       <a:r>
                         <a:rPr sz="850">
                           <a:latin typeface="Arial"/>
@@ -6142,8 +8422,9 @@
                     <a:bodyPr/>
                     <a:lstStyle/>
                     <a:p>
-                      <a:r>
-                        <a:rPr sz="850">
+                      <a:pPr algn="ctr"/>
+                      <a:r>
+                        <a:rPr sz="850" dirty="0">
                           <a:latin typeface="Arial"/>
                         </a:rPr>
                         <a:t>-0.05042</a:t>
@@ -6156,6 +8437,11 @@
                     </a:solidFill>
                   </a:tcPr>
                 </a:tc>
+                <a:extLst>
+                  <a:ext uri="{0D108BD9-81ED-4DB2-BD59-A6C34878D82A}">
+                    <a16:rowId xmlns:a16="http://schemas.microsoft.com/office/drawing/2014/main" val="10004"/>
+                  </a:ext>
+                </a:extLst>
               </a:tr>
             </a:tbl>
           </a:graphicData>
@@ -6170,7 +8456,7 @@
 </file>
 
 <file path=ppt/slides/slide7.xml><?xml version="1.0" encoding="utf-8"?>
-<p:sld xmlns:a="http://schemas.openxmlformats.org/drawingml/2006/main" xmlns:p="http://schemas.openxmlformats.org/presentationml/2006/main" xmlns:r="http://schemas.openxmlformats.org/officeDocument/2006/relationships">
+<p:sld xmlns:a="http://schemas.openxmlformats.org/drawingml/2006/main" xmlns:r="http://schemas.openxmlformats.org/officeDocument/2006/relationships" xmlns:p="http://schemas.openxmlformats.org/presentationml/2006/main">
   <p:cSld>
     <p:spTree>
       <p:nvGrpSpPr>
@@ -6178,7 +8464,14 @@
         <p:cNvGrpSpPr/>
         <p:nvPr/>
       </p:nvGrpSpPr>
-      <p:grpSpPr/>
+      <p:grpSpPr>
+        <a:xfrm>
+          <a:off x="0" y="0"/>
+          <a:ext cx="0" cy="0"/>
+          <a:chOff x="0" y="0"/>
+          <a:chExt cx="0" cy="0"/>
+        </a:xfrm>
+      </p:grpSpPr>
       <p:sp>
         <p:nvSpPr>
           <p:cNvPr id="2" name="Rectangle 1"/>
@@ -6220,6 +8513,7 @@
           <a:lstStyle/>
           <a:p>
             <a:pPr algn="ctr"/>
+            <a:endParaRPr/>
           </a:p>
         </p:txBody>
       </p:sp>
@@ -6232,7 +8526,7 @@
         <p:spPr>
           <a:xfrm>
             <a:off x="360000" y="251999"/>
-            <a:ext cx="9360000" cy="540000"/>
+            <a:ext cx="9360000" cy="707886"/>
           </a:xfrm>
           <a:prstGeom prst="rect">
             <a:avLst/>
@@ -6246,22 +8540,93 @@
           <a:lstStyle/>
           <a:p>
             <a:r>
-              <a:rPr sz="1400">
+              <a:rPr sz="2000" b="1" dirty="0">
+                <a:solidFill>
+                  <a:srgbClr val="0E5C68"/>
+                </a:solidFill>
+                <a:latin typeface="Arial"/>
+              </a:rPr>
+              <a:t>07</a:t>
+            </a:r>
+            <a:r>
+              <a:rPr sz="2000" dirty="0">
                 <a:solidFill>
                   <a:srgbClr val="8A929B"/>
                 </a:solidFill>
                 <a:latin typeface="Consolas"/>
               </a:rPr>
-              <a:t>07  </a:t>
-            </a:r>
-            <a:r>
-              <a:rPr sz="2600" b="1">
+              <a:t>  </a:t>
+            </a:r>
+            <a:r>
+              <a:rPr sz="2000" b="1" dirty="0" err="1">
                 <a:solidFill>
                   <a:srgbClr val="0E5C68"/>
                 </a:solidFill>
                 <a:latin typeface="Arial"/>
               </a:rPr>
-              <a:t>Ensaio 2 — Motor de Pequeno Porte — Zoom na Entrada da Carga (0.1 s antes / 0.2 s depois)</a:t>
+              <a:t>Ensaio</a:t>
+            </a:r>
+            <a:r>
+              <a:rPr sz="2000" b="1" dirty="0">
+                <a:solidFill>
+                  <a:srgbClr val="0E5C68"/>
+                </a:solidFill>
+                <a:latin typeface="Arial"/>
+              </a:rPr>
+              <a:t> 2 — Motor de Pequeno Porte </a:t>
+            </a:r>
+            <a:endParaRPr lang="pt-BR" sz="2000" b="1" dirty="0">
+              <a:solidFill>
+                <a:srgbClr val="0E5C68"/>
+              </a:solidFill>
+              <a:latin typeface="Arial"/>
+            </a:endParaRPr>
+          </a:p>
+          <a:p>
+            <a:r>
+              <a:rPr sz="2000" b="1" dirty="0">
+                <a:solidFill>
+                  <a:srgbClr val="0E5C68"/>
+                </a:solidFill>
+                <a:latin typeface="Arial"/>
+              </a:rPr>
+              <a:t>— Zoom </a:t>
+            </a:r>
+            <a:r>
+              <a:rPr sz="2000" b="1" dirty="0" err="1">
+                <a:solidFill>
+                  <a:srgbClr val="0E5C68"/>
+                </a:solidFill>
+                <a:latin typeface="Arial"/>
+              </a:rPr>
+              <a:t>na</a:t>
+            </a:r>
+            <a:r>
+              <a:rPr sz="2000" b="1" dirty="0">
+                <a:solidFill>
+                  <a:srgbClr val="0E5C68"/>
+                </a:solidFill>
+                <a:latin typeface="Arial"/>
+              </a:rPr>
+              <a:t> Entrada da Carga (0.1 s antes / 0.2 s </a:t>
+            </a:r>
+            <a:r>
+              <a:rPr sz="2000" b="1" dirty="0" err="1">
+                <a:solidFill>
+                  <a:srgbClr val="0E5C68"/>
+                </a:solidFill>
+                <a:latin typeface="Arial"/>
+              </a:rPr>
+              <a:t>depois</a:t>
+            </a:r>
+            <a:r>
+              <a:rPr sz="2000" b="1" dirty="0">
+                <a:solidFill>
+                  <a:srgbClr val="0E5C68"/>
+                </a:solidFill>
+                <a:latin typeface="Arial"/>
+              </a:rPr>
+              <a:t>)</a:t>
             </a:r>
           </a:p>
         </p:txBody>
@@ -6282,7 +8647,7 @@
         </p:blipFill>
         <p:spPr>
           <a:xfrm>
-            <a:off x="251999" y="792000"/>
+            <a:off x="251999" y="1283067"/>
             <a:ext cx="4752000" cy="3394286"/>
           </a:xfrm>
           <a:prstGeom prst="rect">
@@ -6306,7 +8671,7 @@
         </p:blipFill>
         <p:spPr>
           <a:xfrm>
-            <a:off x="5076000" y="792000"/>
+            <a:off x="5076000" y="1283067"/>
             <a:ext cx="4752000" cy="3394286"/>
           </a:xfrm>
           <a:prstGeom prst="rect">
@@ -6323,7 +8688,7 @@
 </file>
 
 <file path=ppt/slides/slide8.xml><?xml version="1.0" encoding="utf-8"?>
-<p:sld xmlns:a="http://schemas.openxmlformats.org/drawingml/2006/main" xmlns:p="http://schemas.openxmlformats.org/presentationml/2006/main" xmlns:r="http://schemas.openxmlformats.org/officeDocument/2006/relationships">
+<p:sld xmlns:a="http://schemas.openxmlformats.org/drawingml/2006/main" xmlns:r="http://schemas.openxmlformats.org/officeDocument/2006/relationships" xmlns:p="http://schemas.openxmlformats.org/presentationml/2006/main">
   <p:cSld>
     <p:spTree>
       <p:nvGrpSpPr>
@@ -6331,7 +8696,14 @@
         <p:cNvGrpSpPr/>
         <p:nvPr/>
       </p:nvGrpSpPr>
-      <p:grpSpPr/>
+      <p:grpSpPr>
+        <a:xfrm>
+          <a:off x="0" y="0"/>
+          <a:ext cx="0" cy="0"/>
+          <a:chOff x="0" y="0"/>
+          <a:chExt cx="0" cy="0"/>
+        </a:xfrm>
+      </p:grpSpPr>
       <p:sp>
         <p:nvSpPr>
           <p:cNvPr id="2" name="Rectangle 1"/>
@@ -6373,6 +8745,7 @@
           <a:lstStyle/>
           <a:p>
             <a:pPr algn="ctr"/>
+            <a:endParaRPr/>
           </a:p>
         </p:txBody>
       </p:sp>
@@ -6396,25 +8769,54 @@
           <a:bodyPr wrap="square">
             <a:spAutoFit/>
           </a:bodyPr>
-          <a:lstStyle/>
-          <a:p>
-            <a:r>
-              <a:rPr sz="1400">
-                <a:solidFill>
-                  <a:srgbClr val="8A929B"/>
-                </a:solidFill>
-                <a:latin typeface="Consolas"/>
-              </a:rPr>
+          <a:lstStyle>
+            <a:defPPr>
+              <a:defRPr lang="en-US"/>
+            </a:defPPr>
+            <a:lvl1pPr>
+              <a:defRPr sz="2000" b="1">
+                <a:solidFill>
+                  <a:srgbClr val="0E5C68"/>
+                </a:solidFill>
+                <a:latin typeface="Arial"/>
+              </a:defRPr>
+            </a:lvl1pPr>
+          </a:lstStyle>
+          <a:p>
+            <a:r>
+              <a:rPr dirty="0"/>
               <a:t>08  </a:t>
             </a:r>
             <a:r>
-              <a:rPr sz="2600" b="1">
-                <a:solidFill>
-                  <a:srgbClr val="0E5C68"/>
-                </a:solidFill>
-                <a:latin typeface="Arial"/>
-              </a:rPr>
-              <a:t>Ensaio 2 — Motor de Grande Porte — Degrau de Carga a 50% da Velocidade (30 Hz)</a:t>
+              <a:rPr dirty="0" err="1"/>
+              <a:t>Ensaio</a:t>
+            </a:r>
+            <a:r>
+              <a:rPr dirty="0"/>
+              <a:t> 2 — Motor de Grande Porte </a:t>
+            </a:r>
+            <a:endParaRPr lang="pt-BR" dirty="0"/>
+          </a:p>
+          <a:p>
+            <a:r>
+              <a:rPr dirty="0"/>
+              <a:t>— </a:t>
+            </a:r>
+            <a:r>
+              <a:rPr dirty="0" err="1"/>
+              <a:t>Degrau</a:t>
+            </a:r>
+            <a:r>
+              <a:rPr dirty="0"/>
+              <a:t> de Carga a 50% da </a:t>
+            </a:r>
+            <a:r>
+              <a:rPr dirty="0" err="1"/>
+              <a:t>Velocidade</a:t>
+            </a:r>
+            <a:r>
+              <a:rPr dirty="0"/>
+              <a:t> (30 Hz)</a:t>
             </a:r>
           </a:p>
         </p:txBody>
@@ -6429,14 +8831,15 @@
         </p:nvPicPr>
         <p:blipFill>
           <a:blip r:embed="rId2"/>
+          <a:srcRect t="3712" b="-1"/>
           <a:stretch>
             <a:fillRect/>
           </a:stretch>
         </p:blipFill>
         <p:spPr>
           <a:xfrm>
-            <a:off x="251999" y="792000"/>
-            <a:ext cx="4752000" cy="3394286"/>
+            <a:off x="251999" y="917998"/>
+            <a:ext cx="4752000" cy="3268287"/>
           </a:xfrm>
           <a:prstGeom prst="rect">
             <a:avLst/>
@@ -6453,14 +8856,15 @@
         </p:nvPicPr>
         <p:blipFill>
           <a:blip r:embed="rId3"/>
+          <a:srcRect t="3712"/>
           <a:stretch>
             <a:fillRect/>
           </a:stretch>
         </p:blipFill>
         <p:spPr>
           <a:xfrm>
-            <a:off x="5076000" y="792000"/>
-            <a:ext cx="4752000" cy="3394286"/>
+            <a:off x="5076000" y="917998"/>
+            <a:ext cx="4752000" cy="3268288"/>
           </a:xfrm>
           <a:prstGeom prst="rect">
             <a:avLst/>
@@ -6473,10 +8877,16 @@
           <p:cNvGraphicFramePr>
             <a:graphicFrameLocks noGrp="1"/>
           </p:cNvGraphicFramePr>
-          <p:nvPr/>
+          <p:nvPr>
+            <p:extLst>
+              <p:ext uri="{D42A27DB-BD31-4B8C-83A1-F6EECF244321}">
+                <p14:modId xmlns:p14="http://schemas.microsoft.com/office/powerpoint/2010/main" val="1049257870"/>
+              </p:ext>
+            </p:extLst>
+          </p:nvPr>
         </p:nvGraphicFramePr>
         <p:xfrm>
-          <a:off x="251999" y="3671999"/>
+          <a:off x="251999" y="3866732"/>
           <a:ext cx="9576000" cy="1728000"/>
         </p:xfrm>
         <a:graphic>
@@ -6486,11 +8896,41 @@
                 <a:tableStyleId>{5C22544A-7EE6-4342-B048-85BDC9FD1C3A}</a:tableStyleId>
               </a:tblPr>
               <a:tblGrid>
-                <a:gridCol w="1915200"/>
-                <a:gridCol w="1915200"/>
-                <a:gridCol w="1915200"/>
-                <a:gridCol w="1915200"/>
-                <a:gridCol w="1915200"/>
+                <a:gridCol w="1915200">
+                  <a:extLst>
+                    <a:ext uri="{9D8B030D-6E8A-4147-A177-3AD203B41FA5}">
+                      <a16:colId xmlns:a16="http://schemas.microsoft.com/office/drawing/2014/main" val="20000"/>
+                    </a:ext>
+                  </a:extLst>
+                </a:gridCol>
+                <a:gridCol w="1915200">
+                  <a:extLst>
+                    <a:ext uri="{9D8B030D-6E8A-4147-A177-3AD203B41FA5}">
+                      <a16:colId xmlns:a16="http://schemas.microsoft.com/office/drawing/2014/main" val="20001"/>
+                    </a:ext>
+                  </a:extLst>
+                </a:gridCol>
+                <a:gridCol w="1915200">
+                  <a:extLst>
+                    <a:ext uri="{9D8B030D-6E8A-4147-A177-3AD203B41FA5}">
+                      <a16:colId xmlns:a16="http://schemas.microsoft.com/office/drawing/2014/main" val="20002"/>
+                    </a:ext>
+                  </a:extLst>
+                </a:gridCol>
+                <a:gridCol w="1915200">
+                  <a:extLst>
+                    <a:ext uri="{9D8B030D-6E8A-4147-A177-3AD203B41FA5}">
+                      <a16:colId xmlns:a16="http://schemas.microsoft.com/office/drawing/2014/main" val="20003"/>
+                    </a:ext>
+                  </a:extLst>
+                </a:gridCol>
+                <a:gridCol w="1915200">
+                  <a:extLst>
+                    <a:ext uri="{9D8B030D-6E8A-4147-A177-3AD203B41FA5}">
+                      <a16:colId xmlns:a16="http://schemas.microsoft.com/office/drawing/2014/main" val="20004"/>
+                    </a:ext>
+                  </a:extLst>
+                </a:gridCol>
               </a:tblGrid>
               <a:tr h="345600">
                 <a:tc>
@@ -6498,65 +8938,96 @@
                     <a:bodyPr/>
                     <a:lstStyle/>
                     <a:p>
-                      <a:r>
-                        <a:rPr sz="900" b="1">
-                          <a:latin typeface="Arial"/>
+                      <a:pPr marL="0" algn="l" defTabSz="457200" rtl="0" eaLnBrk="1" latinLnBrk="0" hangingPunct="1"/>
+                      <a:r>
+                        <a:rPr sz="900" b="1" kern="1200" dirty="0" err="1">
+                          <a:solidFill>
+                            <a:schemeClr val="lt1"/>
+                          </a:solidFill>
+                          <a:latin typeface="Arial"/>
+                          <a:ea typeface="+mn-ea"/>
+                          <a:cs typeface="+mn-cs"/>
                         </a:rPr>
                         <a:t>Ensaio</a:t>
                       </a:r>
-                    </a:p>
-                  </a:txBody>
-                  <a:tcPr>
-                    <a:solidFill>
-                      <a:srgbClr val="E3EEF0"/>
-                    </a:solidFill>
-                  </a:tcPr>
-                </a:tc>
-                <a:tc>
-                  <a:txBody>
-                    <a:bodyPr/>
-                    <a:lstStyle/>
-                    <a:p>
-                      <a:r>
-                        <a:rPr sz="900" b="1">
+                      <a:endParaRPr sz="900" b="1" kern="1200" dirty="0">
+                        <a:solidFill>
+                          <a:schemeClr val="lt1"/>
+                        </a:solidFill>
+                        <a:latin typeface="Arial"/>
+                        <a:ea typeface="+mn-ea"/>
+                        <a:cs typeface="+mn-cs"/>
+                      </a:endParaRPr>
+                    </a:p>
+                  </a:txBody>
+                  <a:tcPr>
+                    <a:solidFill>
+                      <a:srgbClr val="0E5C68"/>
+                    </a:solidFill>
+                  </a:tcPr>
+                </a:tc>
+                <a:tc>
+                  <a:txBody>
+                    <a:bodyPr/>
+                    <a:lstStyle/>
+                    <a:p>
+                      <a:r>
+                        <a:rPr sz="900" b="1" dirty="0" err="1">
                           <a:latin typeface="Arial"/>
                         </a:rPr>
                         <a:t>Cenário</a:t>
                       </a:r>
-                    </a:p>
-                  </a:txBody>
-                  <a:tcPr>
-                    <a:solidFill>
-                      <a:srgbClr val="E3EEF0"/>
-                    </a:solidFill>
-                  </a:tcPr>
-                </a:tc>
-                <a:tc>
-                  <a:txBody>
-                    <a:bodyPr/>
-                    <a:lstStyle/>
-                    <a:p>
-                      <a:r>
-                        <a:rPr sz="900" b="1">
-                          <a:latin typeface="Arial"/>
-                        </a:rPr>
-                        <a:t>Tempo de acomodação (s)</a:t>
-                      </a:r>
-                    </a:p>
-                  </a:txBody>
-                  <a:tcPr>
-                    <a:solidFill>
-                      <a:srgbClr val="E3EEF0"/>
-                    </a:solidFill>
-                  </a:tcPr>
-                </a:tc>
-                <a:tc>
-                  <a:txBody>
-                    <a:bodyPr/>
-                    <a:lstStyle/>
-                    <a:p>
-                      <a:r>
-                        <a:rPr sz="900" b="1">
+                      <a:endParaRPr sz="900" b="1" dirty="0">
+                        <a:latin typeface="Arial"/>
+                      </a:endParaRPr>
+                    </a:p>
+                  </a:txBody>
+                  <a:tcPr>
+                    <a:solidFill>
+                      <a:srgbClr val="0E5C68"/>
+                    </a:solidFill>
+                  </a:tcPr>
+                </a:tc>
+                <a:tc>
+                  <a:txBody>
+                    <a:bodyPr/>
+                    <a:lstStyle/>
+                    <a:p>
+                      <a:pPr algn="ctr"/>
+                      <a:r>
+                        <a:rPr sz="900" b="1" dirty="0">
+                          <a:latin typeface="Arial"/>
+                        </a:rPr>
+                        <a:t>Tempo de </a:t>
+                      </a:r>
+                      <a:r>
+                        <a:rPr sz="900" b="1" dirty="0" err="1">
+                          <a:latin typeface="Arial"/>
+                        </a:rPr>
+                        <a:t>acomodação</a:t>
+                      </a:r>
+                      <a:r>
+                        <a:rPr sz="900" b="1" dirty="0">
+                          <a:latin typeface="Arial"/>
+                        </a:rPr>
+                        <a:t> (s)</a:t>
+                      </a:r>
+                    </a:p>
+                  </a:txBody>
+                  <a:tcPr>
+                    <a:solidFill>
+                      <a:srgbClr val="0E5C68"/>
+                    </a:solidFill>
+                  </a:tcPr>
+                </a:tc>
+                <a:tc>
+                  <a:txBody>
+                    <a:bodyPr/>
+                    <a:lstStyle/>
+                    <a:p>
+                      <a:pPr algn="ctr"/>
+                      <a:r>
+                        <a:rPr sz="900" b="1" dirty="0">
                           <a:latin typeface="Arial"/>
                         </a:rPr>
                         <a:t>Erro de regime</a:t>
@@ -6565,29 +9036,41 @@
                   </a:txBody>
                   <a:tcPr>
                     <a:solidFill>
-                      <a:srgbClr val="E3EEF0"/>
-                    </a:solidFill>
-                  </a:tcPr>
-                </a:tc>
-                <a:tc>
-                  <a:txBody>
-                    <a:bodyPr/>
-                    <a:lstStyle/>
-                    <a:p>
-                      <a:r>
-                        <a:rPr sz="900" b="1">
-                          <a:latin typeface="Arial"/>
-                        </a:rPr>
-                        <a:t>Sobressinal (%)</a:t>
-                      </a:r>
-                    </a:p>
-                  </a:txBody>
-                  <a:tcPr>
-                    <a:solidFill>
-                      <a:srgbClr val="E3EEF0"/>
-                    </a:solidFill>
-                  </a:tcPr>
-                </a:tc>
+                      <a:srgbClr val="0E5C68"/>
+                    </a:solidFill>
+                  </a:tcPr>
+                </a:tc>
+                <a:tc>
+                  <a:txBody>
+                    <a:bodyPr/>
+                    <a:lstStyle/>
+                    <a:p>
+                      <a:pPr algn="ctr"/>
+                      <a:r>
+                        <a:rPr sz="900" b="1" dirty="0" err="1">
+                          <a:latin typeface="Arial"/>
+                        </a:rPr>
+                        <a:t>Sobressinal</a:t>
+                      </a:r>
+                      <a:r>
+                        <a:rPr sz="900" b="1" dirty="0">
+                          <a:latin typeface="Arial"/>
+                        </a:rPr>
+                        <a:t> (%)</a:t>
+                      </a:r>
+                    </a:p>
+                  </a:txBody>
+                  <a:tcPr>
+                    <a:solidFill>
+                      <a:srgbClr val="0E5C68"/>
+                    </a:solidFill>
+                  </a:tcPr>
+                </a:tc>
+                <a:extLst>
+                  <a:ext uri="{0D108BD9-81ED-4DB2-BD59-A6C34878D82A}">
+                    <a16:rowId xmlns:a16="http://schemas.microsoft.com/office/drawing/2014/main" val="10000"/>
+                  </a:ext>
+                </a:extLst>
               </a:tr>
               <a:tr h="345600">
                 <a:tc>
@@ -6596,10 +9079,35 @@
                     <a:lstStyle/>
                     <a:p>
                       <a:r>
+                        <a:rPr sz="850" dirty="0" err="1">
+                          <a:latin typeface="Arial"/>
+                        </a:rPr>
+                        <a:t>Degrau</a:t>
+                      </a:r>
+                      <a:r>
+                        <a:rPr sz="850" dirty="0">
+                          <a:latin typeface="Arial"/>
+                        </a:rPr>
+                        <a:t> de carga - Torque</a:t>
+                      </a:r>
+                    </a:p>
+                  </a:txBody>
+                  <a:tcPr>
+                    <a:solidFill>
+                      <a:srgbClr val="FFFFFF"/>
+                    </a:solidFill>
+                  </a:tcPr>
+                </a:tc>
+                <a:tc>
+                  <a:txBody>
+                    <a:bodyPr/>
+                    <a:lstStyle/>
+                    <a:p>
+                      <a:r>
                         <a:rPr sz="850">
                           <a:latin typeface="Arial"/>
                         </a:rPr>
-                        <a:t>Degrau de carga - Torque</a:t>
+                        <a:t>Inversor V/F</a:t>
                       </a:r>
                     </a:p>
                   </a:txBody>
@@ -6614,11 +9122,12 @@
                     <a:bodyPr/>
                     <a:lstStyle/>
                     <a:p>
+                      <a:pPr algn="ctr"/>
                       <a:r>
                         <a:rPr sz="850">
                           <a:latin typeface="Arial"/>
                         </a:rPr>
-                        <a:t>Inversor V/F</a:t>
+                        <a:t>0.4979</a:t>
                       </a:r>
                     </a:p>
                   </a:txBody>
@@ -6633,11 +9142,12 @@
                     <a:bodyPr/>
                     <a:lstStyle/>
                     <a:p>
+                      <a:pPr algn="ctr"/>
                       <a:r>
                         <a:rPr sz="850">
                           <a:latin typeface="Arial"/>
                         </a:rPr>
-                        <a:t>0.4979</a:t>
+                        <a:t>9.085e-06</a:t>
                       </a:r>
                     </a:p>
                   </a:txBody>
@@ -6652,11 +9162,12 @@
                     <a:bodyPr/>
                     <a:lstStyle/>
                     <a:p>
+                      <a:pPr algn="ctr"/>
                       <a:r>
                         <a:rPr sz="850">
                           <a:latin typeface="Arial"/>
                         </a:rPr>
-                        <a:t>9.085e-06</a:t>
+                        <a:t>-90.23</a:t>
                       </a:r>
                     </a:p>
                   </a:txBody>
@@ -6666,25 +9177,11 @@
                     </a:solidFill>
                   </a:tcPr>
                 </a:tc>
-                <a:tc>
-                  <a:txBody>
-                    <a:bodyPr/>
-                    <a:lstStyle/>
-                    <a:p>
-                      <a:r>
-                        <a:rPr sz="850">
-                          <a:latin typeface="Arial"/>
-                        </a:rPr>
-                        <a:t>-90.23</a:t>
-                      </a:r>
-                    </a:p>
-                  </a:txBody>
-                  <a:tcPr>
-                    <a:solidFill>
-                      <a:srgbClr val="FFFFFF"/>
-                    </a:solidFill>
-                  </a:tcPr>
-                </a:tc>
+                <a:extLst>
+                  <a:ext uri="{0D108BD9-81ED-4DB2-BD59-A6C34878D82A}">
+                    <a16:rowId xmlns:a16="http://schemas.microsoft.com/office/drawing/2014/main" val="10001"/>
+                  </a:ext>
+                </a:extLst>
               </a:tr>
               <a:tr h="345600">
                 <a:tc>
@@ -6730,6 +9227,7 @@
                     <a:bodyPr/>
                     <a:lstStyle/>
                     <a:p>
+                      <a:pPr algn="ctr"/>
                       <a:r>
                         <a:rPr sz="850">
                           <a:latin typeface="Arial"/>
@@ -6749,6 +9247,7 @@
                     <a:bodyPr/>
                     <a:lstStyle/>
                     <a:p>
+                      <a:pPr algn="ctr"/>
                       <a:r>
                         <a:rPr sz="850">
                           <a:latin typeface="Arial"/>
@@ -6768,6 +9267,7 @@
                     <a:bodyPr/>
                     <a:lstStyle/>
                     <a:p>
+                      <a:pPr algn="ctr"/>
                       <a:r>
                         <a:rPr sz="850">
                           <a:latin typeface="Arial"/>
@@ -6782,6 +9282,11 @@
                     </a:solidFill>
                   </a:tcPr>
                 </a:tc>
+                <a:extLst>
+                  <a:ext uri="{0D108BD9-81ED-4DB2-BD59-A6C34878D82A}">
+                    <a16:rowId xmlns:a16="http://schemas.microsoft.com/office/drawing/2014/main" val="10002"/>
+                  </a:ext>
+                </a:extLst>
               </a:tr>
               <a:tr h="345600">
                 <a:tc>
@@ -6827,6 +9332,7 @@
                     <a:bodyPr/>
                     <a:lstStyle/>
                     <a:p>
+                      <a:pPr algn="ctr"/>
                       <a:r>
                         <a:rPr sz="850">
                           <a:latin typeface="Arial"/>
@@ -6846,6 +9352,7 @@
                     <a:bodyPr/>
                     <a:lstStyle/>
                     <a:p>
+                      <a:pPr algn="ctr"/>
                       <a:r>
                         <a:rPr sz="850">
                           <a:latin typeface="Arial"/>
@@ -6865,8 +9372,9 @@
                     <a:bodyPr/>
                     <a:lstStyle/>
                     <a:p>
-                      <a:r>
-                        <a:rPr sz="850">
+                      <a:pPr algn="ctr"/>
+                      <a:r>
+                        <a:rPr sz="850" dirty="0">
                           <a:latin typeface="Arial"/>
                         </a:rPr>
                         <a:t>-4.565</a:t>
@@ -6879,6 +9387,11 @@
                     </a:solidFill>
                   </a:tcPr>
                 </a:tc>
+                <a:extLst>
+                  <a:ext uri="{0D108BD9-81ED-4DB2-BD59-A6C34878D82A}">
+                    <a16:rowId xmlns:a16="http://schemas.microsoft.com/office/drawing/2014/main" val="10003"/>
+                  </a:ext>
+                </a:extLst>
               </a:tr>
               <a:tr h="345600">
                 <a:tc>
@@ -6924,6 +9437,7 @@
                     <a:bodyPr/>
                     <a:lstStyle/>
                     <a:p>
+                      <a:pPr algn="ctr"/>
                       <a:r>
                         <a:rPr sz="850">
                           <a:latin typeface="Arial"/>
@@ -6943,6 +9457,7 @@
                     <a:bodyPr/>
                     <a:lstStyle/>
                     <a:p>
+                      <a:pPr algn="ctr"/>
                       <a:r>
                         <a:rPr sz="850">
                           <a:latin typeface="Arial"/>
@@ -6962,8 +9477,9 @@
                     <a:bodyPr/>
                     <a:lstStyle/>
                     <a:p>
-                      <a:r>
-                        <a:rPr sz="850">
+                      <a:pPr algn="ctr"/>
+                      <a:r>
+                        <a:rPr sz="850" dirty="0">
                           <a:latin typeface="Arial"/>
                         </a:rPr>
                         <a:t>-0.01588</a:t>
@@ -6976,6 +9492,11 @@
                     </a:solidFill>
                   </a:tcPr>
                 </a:tc>
+                <a:extLst>
+                  <a:ext uri="{0D108BD9-81ED-4DB2-BD59-A6C34878D82A}">
+                    <a16:rowId xmlns:a16="http://schemas.microsoft.com/office/drawing/2014/main" val="10004"/>
+                  </a:ext>
+                </a:extLst>
               </a:tr>
             </a:tbl>
           </a:graphicData>
@@ -6990,7 +9511,7 @@
 </file>
 
 <file path=ppt/slides/slide9.xml><?xml version="1.0" encoding="utf-8"?>
-<p:sld xmlns:a="http://schemas.openxmlformats.org/drawingml/2006/main" xmlns:p="http://schemas.openxmlformats.org/presentationml/2006/main" xmlns:r="http://schemas.openxmlformats.org/officeDocument/2006/relationships">
+<p:sld xmlns:a="http://schemas.openxmlformats.org/drawingml/2006/main" xmlns:r="http://schemas.openxmlformats.org/officeDocument/2006/relationships" xmlns:p="http://schemas.openxmlformats.org/presentationml/2006/main">
   <p:cSld>
     <p:spTree>
       <p:nvGrpSpPr>
@@ -6998,7 +9519,14 @@
         <p:cNvGrpSpPr/>
         <p:nvPr/>
       </p:nvGrpSpPr>
-      <p:grpSpPr/>
+      <p:grpSpPr>
+        <a:xfrm>
+          <a:off x="0" y="0"/>
+          <a:ext cx="0" cy="0"/>
+          <a:chOff x="0" y="0"/>
+          <a:chExt cx="0" cy="0"/>
+        </a:xfrm>
+      </p:grpSpPr>
       <p:sp>
         <p:nvSpPr>
           <p:cNvPr id="2" name="Rectangle 1"/>
@@ -7040,6 +9568,7 @@
           <a:lstStyle/>
           <a:p>
             <a:pPr algn="ctr"/>
+            <a:endParaRPr/>
           </a:p>
         </p:txBody>
       </p:sp>
@@ -7063,25 +9592,54 @@
           <a:bodyPr wrap="square">
             <a:spAutoFit/>
           </a:bodyPr>
-          <a:lstStyle/>
-          <a:p>
-            <a:r>
-              <a:rPr sz="1400">
-                <a:solidFill>
-                  <a:srgbClr val="8A929B"/>
-                </a:solidFill>
-                <a:latin typeface="Consolas"/>
-              </a:rPr>
+          <a:lstStyle>
+            <a:defPPr>
+              <a:defRPr lang="en-US"/>
+            </a:defPPr>
+            <a:lvl1pPr>
+              <a:defRPr sz="2000" b="1">
+                <a:solidFill>
+                  <a:srgbClr val="0E5C68"/>
+                </a:solidFill>
+                <a:latin typeface="Arial"/>
+              </a:defRPr>
+            </a:lvl1pPr>
+          </a:lstStyle>
+          <a:p>
+            <a:r>
+              <a:rPr dirty="0"/>
               <a:t>09  </a:t>
             </a:r>
             <a:r>
-              <a:rPr sz="2600" b="1">
-                <a:solidFill>
-                  <a:srgbClr val="0E5C68"/>
-                </a:solidFill>
-                <a:latin typeface="Arial"/>
-              </a:rPr>
-              <a:t>Ensaio 2 — Motor de Grande Porte — Zoom na Entrada da Carga (0.5 s antes / 1 s depois)</a:t>
+              <a:rPr dirty="0" err="1"/>
+              <a:t>Ensaio</a:t>
+            </a:r>
+            <a:r>
+              <a:rPr dirty="0"/>
+              <a:t> 2 — Motor de Grande Porte </a:t>
+            </a:r>
+            <a:endParaRPr lang="pt-BR" dirty="0"/>
+          </a:p>
+          <a:p>
+            <a:r>
+              <a:rPr dirty="0"/>
+              <a:t>— Zoom </a:t>
+            </a:r>
+            <a:r>
+              <a:rPr dirty="0" err="1"/>
+              <a:t>na</a:t>
+            </a:r>
+            <a:r>
+              <a:rPr dirty="0"/>
+              <a:t> Entrada da Carga (0.5 s antes / 1 s </a:t>
+            </a:r>
+            <a:r>
+              <a:rPr dirty="0" err="1"/>
+              <a:t>depois</a:t>
+            </a:r>
+            <a:r>
+              <a:rPr dirty="0"/>
+              <a:t>)</a:t>
             </a:r>
           </a:p>
         </p:txBody>
@@ -7102,7 +9660,7 @@
         </p:blipFill>
         <p:spPr>
           <a:xfrm>
-            <a:off x="251999" y="792000"/>
+            <a:off x="251999" y="1198401"/>
             <a:ext cx="4752000" cy="3394286"/>
           </a:xfrm>
           <a:prstGeom prst="rect">
@@ -7126,7 +9684,7 @@
         </p:blipFill>
         <p:spPr>
           <a:xfrm>
-            <a:off x="5076000" y="792000"/>
+            <a:off x="5076000" y="1198401"/>
             <a:ext cx="4752000" cy="3394286"/>
           </a:xfrm>
           <a:prstGeom prst="rect">
